--- a/Term 5/MicroProcessor/Slides/Micro-Lec11-ADCDAC.pptx
+++ b/Term 5/MicroProcessor/Slides/Micro-Lec11-ADCDAC.pptx
@@ -131,7 +131,7 @@
   </p:defaultTextStyle>
   <p:extLst>
     <p:ext uri="{EFAFB233-063F-42B5-8137-9DF3F51BA10A}">
-      <p15:sldGuideLst xmlns:p15="http://schemas.microsoft.com/office/powerpoint/2012/main" xmlns="">
+      <p15:sldGuideLst xmlns:p15="http://schemas.microsoft.com/office/powerpoint/2012/main">
         <p15:guide id="1" orient="horz" pos="2160">
           <p15:clr>
             <a:srgbClr val="A4A3A4"/>
@@ -145,7 +145,7 @@
       </p15:sldGuideLst>
     </p:ext>
     <p:ext uri="{2D200454-40CA-4A62-9FC3-DE9A4176ACB9}">
-      <p15:notesGuideLst xmlns:p15="http://schemas.microsoft.com/office/powerpoint/2012/main" xmlns="">
+      <p15:notesGuideLst xmlns:p15="http://schemas.microsoft.com/office/powerpoint/2012/main">
         <p15:guide id="1" orient="horz" pos="2880">
           <p15:clr>
             <a:srgbClr val="A4A3A4"/>
@@ -254,7 +254,7 @@
           <a:p>
             <a:fld id="{33A2C78E-1418-4D80-911C-2F94FB99BDBC}" type="datetimeFigureOut">
               <a:rPr lang="en-US" smtClean="0"/>
-              <a:t>8/19/2024</a:t>
+              <a:t>12/27/2025</a:t>
             </a:fld>
             <a:endParaRPr lang="en-US"/>
           </a:p>
@@ -419,7 +419,7 @@
           <a:p>
             <a:fld id="{1479DE93-9629-4701-8E4D-06B6CC932194}" type="datetimeFigureOut">
               <a:rPr lang="en-US" smtClean="0"/>
-              <a:t>8/19/2024</a:t>
+              <a:t>12/27/2025</a:t>
             </a:fld>
             <a:endParaRPr lang="en-US"/>
           </a:p>
@@ -483,38 +483,37 @@
           <a:p>
             <a:pPr lvl="0"/>
             <a:r>
-              <a:rPr lang="en-US" smtClean="0"/>
+              <a:rPr lang="en-US"/>
               <a:t>Click to edit Master text styles</a:t>
             </a:r>
           </a:p>
           <a:p>
             <a:pPr lvl="1"/>
             <a:r>
-              <a:rPr lang="en-US" smtClean="0"/>
+              <a:rPr lang="en-US"/>
               <a:t>Second level</a:t>
             </a:r>
           </a:p>
           <a:p>
             <a:pPr lvl="2"/>
             <a:r>
-              <a:rPr lang="en-US" smtClean="0"/>
+              <a:rPr lang="en-US"/>
               <a:t>Third level</a:t>
             </a:r>
           </a:p>
           <a:p>
             <a:pPr lvl="3"/>
             <a:r>
-              <a:rPr lang="en-US" smtClean="0"/>
+              <a:rPr lang="en-US"/>
               <a:t>Fourth level</a:t>
             </a:r>
           </a:p>
           <a:p>
             <a:pPr lvl="4"/>
             <a:r>
-              <a:rPr lang="en-US" smtClean="0"/>
+              <a:rPr lang="en-US"/>
               <a:t>Fifth level</a:t>
             </a:r>
-            <a:endParaRPr lang="en-US"/>
           </a:p>
         </p:txBody>
       </p:sp>
@@ -809,10 +808,9 @@
           <a:lstStyle/>
           <a:p>
             <a:r>
-              <a:rPr lang="en-US" smtClean="0"/>
+              <a:rPr lang="en-US"/>
               <a:t>Click to edit Master title style</a:t>
             </a:r>
-            <a:endParaRPr lang="en-US"/>
           </a:p>
         </p:txBody>
       </p:sp>
@@ -928,10 +926,9 @@
           </a:lstStyle>
           <a:p>
             <a:r>
-              <a:rPr lang="en-US" smtClean="0"/>
+              <a:rPr lang="en-US"/>
               <a:t>Click to edit Master subtitle style</a:t>
             </a:r>
-            <a:endParaRPr lang="en-US"/>
           </a:p>
         </p:txBody>
       </p:sp>
@@ -959,7 +956,7 @@
           <a:p>
             <a:fld id="{40281FD0-B2DB-4ECA-ADAD-7146D3D1D0F9}" type="datetime1">
               <a:rPr lang="en-US" smtClean="0"/>
-              <a:t>8/19/2024</a:t>
+              <a:t>12/27/2025</a:t>
             </a:fld>
             <a:endParaRPr lang="en-US" dirty="0"/>
           </a:p>
@@ -981,7 +978,7 @@
           <a:lstStyle/>
           <a:p>
             <a:r>
-              <a:rPr lang="en-US" smtClean="0"/>
+              <a:rPr lang="en-US"/>
               <a:t>Memory-Mapped SPM</a:t>
             </a:r>
             <a:endParaRPr lang="en-US" dirty="0"/>
@@ -1060,10 +1057,9 @@
           <a:lstStyle/>
           <a:p>
             <a:r>
-              <a:rPr lang="en-US" smtClean="0"/>
+              <a:rPr lang="en-US"/>
               <a:t>Click to edit Master title style</a:t>
             </a:r>
-            <a:endParaRPr lang="en-US"/>
           </a:p>
         </p:txBody>
       </p:sp>
@@ -1084,38 +1080,37 @@
           <a:p>
             <a:pPr lvl="0"/>
             <a:r>
-              <a:rPr lang="en-US" smtClean="0"/>
+              <a:rPr lang="en-US"/>
               <a:t>Click to edit Master text styles</a:t>
             </a:r>
           </a:p>
           <a:p>
             <a:pPr lvl="1"/>
             <a:r>
-              <a:rPr lang="en-US" smtClean="0"/>
+              <a:rPr lang="en-US"/>
               <a:t>Second level</a:t>
             </a:r>
           </a:p>
           <a:p>
             <a:pPr lvl="2"/>
             <a:r>
-              <a:rPr lang="en-US" smtClean="0"/>
+              <a:rPr lang="en-US"/>
               <a:t>Third level</a:t>
             </a:r>
           </a:p>
           <a:p>
             <a:pPr lvl="3"/>
             <a:r>
-              <a:rPr lang="en-US" smtClean="0"/>
+              <a:rPr lang="en-US"/>
               <a:t>Fourth level</a:t>
             </a:r>
           </a:p>
           <a:p>
             <a:pPr lvl="4"/>
             <a:r>
-              <a:rPr lang="en-US" smtClean="0"/>
+              <a:rPr lang="en-US"/>
               <a:t>Fifth level</a:t>
             </a:r>
-            <a:endParaRPr lang="en-US"/>
           </a:p>
         </p:txBody>
       </p:sp>
@@ -1136,7 +1131,7 @@
           <a:p>
             <a:fld id="{C5CAF6BC-C327-4940-9830-49E66FCBC3F0}" type="datetime1">
               <a:rPr lang="en-US" smtClean="0"/>
-              <a:t>8/19/2024</a:t>
+              <a:t>12/27/2025</a:t>
             </a:fld>
             <a:endParaRPr lang="en-US"/>
           </a:p>
@@ -1158,10 +1153,9 @@
           <a:lstStyle/>
           <a:p>
             <a:r>
-              <a:rPr lang="en-US" smtClean="0"/>
+              <a:rPr lang="en-US"/>
               <a:t>Memory-Mapped SPM</a:t>
             </a:r>
-            <a:endParaRPr lang="en-US"/>
           </a:p>
         </p:txBody>
       </p:sp>
@@ -1235,10 +1229,9 @@
           <a:lstStyle/>
           <a:p>
             <a:r>
-              <a:rPr lang="en-US" smtClean="0"/>
+              <a:rPr lang="en-US"/>
               <a:t>Click to edit Master title style</a:t>
             </a:r>
-            <a:endParaRPr lang="en-US"/>
           </a:p>
         </p:txBody>
       </p:sp>
@@ -1264,38 +1257,37 @@
           <a:p>
             <a:pPr lvl="0"/>
             <a:r>
-              <a:rPr lang="en-US" smtClean="0"/>
+              <a:rPr lang="en-US"/>
               <a:t>Click to edit Master text styles</a:t>
             </a:r>
           </a:p>
           <a:p>
             <a:pPr lvl="1"/>
             <a:r>
-              <a:rPr lang="en-US" smtClean="0"/>
+              <a:rPr lang="en-US"/>
               <a:t>Second level</a:t>
             </a:r>
           </a:p>
           <a:p>
             <a:pPr lvl="2"/>
             <a:r>
-              <a:rPr lang="en-US" smtClean="0"/>
+              <a:rPr lang="en-US"/>
               <a:t>Third level</a:t>
             </a:r>
           </a:p>
           <a:p>
             <a:pPr lvl="3"/>
             <a:r>
-              <a:rPr lang="en-US" smtClean="0"/>
+              <a:rPr lang="en-US"/>
               <a:t>Fourth level</a:t>
             </a:r>
           </a:p>
           <a:p>
             <a:pPr lvl="4"/>
             <a:r>
-              <a:rPr lang="en-US" smtClean="0"/>
+              <a:rPr lang="en-US"/>
               <a:t>Fifth level</a:t>
             </a:r>
-            <a:endParaRPr lang="en-US"/>
           </a:p>
         </p:txBody>
       </p:sp>
@@ -1316,7 +1308,7 @@
           <a:p>
             <a:fld id="{CB595183-C90F-4867-BE66-12679E27E67F}" type="datetime1">
               <a:rPr lang="en-US" smtClean="0"/>
-              <a:t>8/19/2024</a:t>
+              <a:t>12/27/2025</a:t>
             </a:fld>
             <a:endParaRPr lang="en-US"/>
           </a:p>
@@ -1338,10 +1330,9 @@
           <a:lstStyle/>
           <a:p>
             <a:r>
-              <a:rPr lang="en-US" smtClean="0"/>
+              <a:rPr lang="en-US"/>
               <a:t>Memory-Mapped SPM</a:t>
             </a:r>
-            <a:endParaRPr lang="en-US"/>
           </a:p>
         </p:txBody>
       </p:sp>
@@ -1469,9 +1460,7 @@
         </p:style>
         <p:txBody>
           <a:bodyPr anchor="ctr"/>
-          <a:lstStyle>
-            <a:extLst/>
-          </a:lstStyle>
+          <a:lstStyle/>
           <a:p>
             <a:pPr algn="ctr" eaLnBrk="1" latinLnBrk="0" hangingPunct="1"/>
             <a:endParaRPr kumimoji="0" lang="en-US"/>
@@ -1541,9 +1530,7 @@
         </p:style>
         <p:txBody>
           <a:bodyPr anchor="ctr"/>
-          <a:lstStyle>
-            <a:extLst/>
-          </a:lstStyle>
+          <a:lstStyle/>
           <a:p>
             <a:pPr algn="ctr" eaLnBrk="1" latinLnBrk="0" hangingPunct="1"/>
             <a:endParaRPr kumimoji="0" lang="en-US"/>
@@ -1590,10 +1577,9 @@
           </a:lstStyle>
           <a:p>
             <a:r>
-              <a:rPr kumimoji="0" lang="en-US" smtClean="0"/>
+              <a:rPr kumimoji="0" lang="en-US"/>
               <a:t>Click to edit Master title style</a:t>
             </a:r>
-            <a:endParaRPr kumimoji="0" lang="en-US"/>
           </a:p>
         </p:txBody>
       </p:sp>
@@ -1657,10 +1643,9 @@
           </a:lstStyle>
           <a:p>
             <a:r>
-              <a:rPr kumimoji="0" lang="en-US" smtClean="0"/>
+              <a:rPr kumimoji="0" lang="en-US"/>
               <a:t>Click to edit Master subtitle style</a:t>
             </a:r>
-            <a:endParaRPr kumimoji="0" lang="en-US"/>
           </a:p>
         </p:txBody>
       </p:sp>
@@ -1677,13 +1662,11 @@
         <p:spPr/>
         <p:txBody>
           <a:bodyPr/>
-          <a:lstStyle>
-            <a:extLst/>
-          </a:lstStyle>
+          <a:lstStyle/>
           <a:p>
             <a:fld id="{F6A59B0B-27CB-4279-84EE-13F34D832C20}" type="datetime1">
               <a:rPr lang="en-US" smtClean="0"/>
-              <a:t>8/19/2024</a:t>
+              <a:t>12/27/2025</a:t>
             </a:fld>
             <a:endParaRPr lang="en-US" dirty="0"/>
           </a:p>
@@ -1702,12 +1685,10 @@
         <p:spPr/>
         <p:txBody>
           <a:bodyPr/>
-          <a:lstStyle>
-            <a:extLst/>
-          </a:lstStyle>
-          <a:p>
-            <a:r>
-              <a:rPr lang="en-US" smtClean="0"/>
+          <a:lstStyle/>
+          <a:p>
+            <a:r>
+              <a:rPr lang="en-US"/>
               <a:t>Memory-Mapped SPM</a:t>
             </a:r>
             <a:endParaRPr lang="en-US" dirty="0"/>
@@ -1727,9 +1708,7 @@
         <p:spPr/>
         <p:txBody>
           <a:bodyPr/>
-          <a:lstStyle>
-            <a:extLst/>
-          </a:lstStyle>
+          <a:lstStyle/>
           <a:p>
             <a:fld id="{B6F15528-21DE-4FAA-801E-634DDDAF4B2B}" type="slidenum">
               <a:rPr lang="en-US" smtClean="0"/>
@@ -1783,15 +1762,12 @@
         </p:spPr>
         <p:txBody>
           <a:bodyPr/>
-          <a:lstStyle>
-            <a:extLst/>
-          </a:lstStyle>
-          <a:p>
-            <a:r>
-              <a:rPr kumimoji="0" lang="en-US" smtClean="0"/>
+          <a:lstStyle/>
+          <a:p>
+            <a:r>
+              <a:rPr kumimoji="0" lang="en-US"/>
               <a:t>Click to edit Master title style</a:t>
             </a:r>
-            <a:endParaRPr kumimoji="0" lang="en-US"/>
           </a:p>
         </p:txBody>
       </p:sp>
@@ -1813,41 +1789,39 @@
         </p:spPr>
         <p:txBody>
           <a:bodyPr/>
-          <a:lstStyle>
-            <a:extLst/>
-          </a:lstStyle>
+          <a:lstStyle/>
           <a:p>
             <a:pPr lvl="0" eaLnBrk="1" latinLnBrk="0" hangingPunct="1"/>
             <a:r>
-              <a:rPr lang="en-US" smtClean="0"/>
+              <a:rPr lang="en-US"/>
               <a:t>Click to edit Master text styles</a:t>
             </a:r>
           </a:p>
           <a:p>
             <a:pPr lvl="1" eaLnBrk="1" latinLnBrk="0" hangingPunct="1"/>
             <a:r>
-              <a:rPr lang="en-US" smtClean="0"/>
+              <a:rPr lang="en-US"/>
               <a:t>Second level</a:t>
             </a:r>
           </a:p>
           <a:p>
             <a:pPr lvl="2" eaLnBrk="1" latinLnBrk="0" hangingPunct="1"/>
             <a:r>
-              <a:rPr lang="en-US" smtClean="0"/>
+              <a:rPr lang="en-US"/>
               <a:t>Third level</a:t>
             </a:r>
           </a:p>
           <a:p>
             <a:pPr lvl="3" eaLnBrk="1" latinLnBrk="0" hangingPunct="1"/>
             <a:r>
-              <a:rPr lang="en-US" smtClean="0"/>
+              <a:rPr lang="en-US"/>
               <a:t>Fourth level</a:t>
             </a:r>
           </a:p>
           <a:p>
             <a:pPr lvl="4" eaLnBrk="1" latinLnBrk="0" hangingPunct="1"/>
             <a:r>
-              <a:rPr lang="en-US" smtClean="0"/>
+              <a:rPr lang="en-US"/>
               <a:t>Fifth level</a:t>
             </a:r>
             <a:endParaRPr kumimoji="0" lang="en-US"/>
@@ -1867,13 +1841,11 @@
         <p:spPr/>
         <p:txBody>
           <a:bodyPr/>
-          <a:lstStyle>
-            <a:extLst/>
-          </a:lstStyle>
+          <a:lstStyle/>
           <a:p>
             <a:fld id="{187946A9-DE9C-4C0F-8CC5-C706728E934F}" type="datetime1">
               <a:rPr lang="en-US" smtClean="0"/>
-              <a:t>8/19/2024</a:t>
+              <a:t>12/27/2025</a:t>
             </a:fld>
             <a:endParaRPr lang="en-US"/>
           </a:p>
@@ -1892,12 +1864,10 @@
         <p:spPr/>
         <p:txBody>
           <a:bodyPr/>
-          <a:lstStyle>
-            <a:extLst/>
-          </a:lstStyle>
-          <a:p>
-            <a:r>
-              <a:rPr lang="en-US" smtClean="0"/>
+          <a:lstStyle/>
+          <a:p>
+            <a:r>
+              <a:rPr lang="en-US"/>
               <a:t>Memory-Mapped SPM</a:t>
             </a:r>
             <a:endParaRPr lang="en-US" dirty="0"/>
@@ -1917,9 +1887,7 @@
         <p:spPr/>
         <p:txBody>
           <a:bodyPr/>
-          <a:lstStyle>
-            <a:extLst/>
-          </a:lstStyle>
+          <a:lstStyle/>
           <a:p>
             <a:fld id="{B6F15528-21DE-4FAA-801E-634DDDAF4B2B}" type="slidenum">
               <a:rPr lang="en-US" smtClean="0"/>
@@ -2030,9 +1998,7 @@
         </p:style>
         <p:txBody>
           <a:bodyPr anchor="ctr"/>
-          <a:lstStyle>
-            <a:extLst/>
-          </a:lstStyle>
+          <a:lstStyle/>
           <a:p>
             <a:pPr algn="ctr" eaLnBrk="1" latinLnBrk="0" hangingPunct="1"/>
             <a:endParaRPr kumimoji="0" lang="en-US"/>
@@ -2102,9 +2068,7 @@
         </p:style>
         <p:txBody>
           <a:bodyPr anchor="ctr"/>
-          <a:lstStyle>
-            <a:extLst/>
-          </a:lstStyle>
+          <a:lstStyle/>
           <a:p>
             <a:pPr algn="ctr" eaLnBrk="1" latinLnBrk="0" hangingPunct="1"/>
             <a:endParaRPr kumimoji="0" lang="en-US"/>
@@ -2145,10 +2109,9 @@
           </a:lstStyle>
           <a:p>
             <a:r>
-              <a:rPr kumimoji="0" lang="en-US" smtClean="0"/>
+              <a:rPr kumimoji="0" lang="en-US"/>
               <a:t>Click to edit Master title style</a:t>
             </a:r>
-            <a:endParaRPr kumimoji="0" lang="en-US"/>
           </a:p>
         </p:txBody>
       </p:sp>
@@ -2234,7 +2197,7 @@
           <a:p>
             <a:pPr lvl="0" eaLnBrk="1" latinLnBrk="0" hangingPunct="1"/>
             <a:r>
-              <a:rPr kumimoji="0" lang="en-US" smtClean="0"/>
+              <a:rPr kumimoji="0" lang="en-US"/>
               <a:t>Click to edit Master text styles</a:t>
             </a:r>
           </a:p>
@@ -2253,13 +2216,11 @@
         <p:spPr/>
         <p:txBody>
           <a:bodyPr/>
-          <a:lstStyle>
-            <a:extLst/>
-          </a:lstStyle>
+          <a:lstStyle/>
           <a:p>
             <a:fld id="{98237A1E-E215-416E-8D25-5F336D5B557C}" type="datetime1">
               <a:rPr lang="en-US" smtClean="0"/>
-              <a:t>8/19/2024</a:t>
+              <a:t>12/27/2025</a:t>
             </a:fld>
             <a:endParaRPr lang="en-US"/>
           </a:p>
@@ -2278,15 +2239,12 @@
         <p:spPr/>
         <p:txBody>
           <a:bodyPr/>
-          <a:lstStyle>
-            <a:extLst/>
-          </a:lstStyle>
-          <a:p>
-            <a:r>
-              <a:rPr lang="en-US" smtClean="0"/>
+          <a:lstStyle/>
+          <a:p>
+            <a:r>
+              <a:rPr lang="en-US"/>
               <a:t>Memory-Mapped SPM</a:t>
             </a:r>
-            <a:endParaRPr lang="en-US"/>
           </a:p>
         </p:txBody>
       </p:sp>
@@ -2303,9 +2261,7 @@
         <p:spPr/>
         <p:txBody>
           <a:bodyPr/>
-          <a:lstStyle>
-            <a:extLst/>
-          </a:lstStyle>
+          <a:lstStyle/>
           <a:p>
             <a:fld id="{B6F15528-21DE-4FAA-801E-634DDDAF4B2B}" type="slidenum">
               <a:rPr lang="en-US" smtClean="0"/>
@@ -2354,15 +2310,12 @@
         <p:spPr/>
         <p:txBody>
           <a:bodyPr/>
-          <a:lstStyle>
-            <a:extLst/>
-          </a:lstStyle>
-          <a:p>
-            <a:r>
-              <a:rPr kumimoji="0" lang="en-US" smtClean="0"/>
+          <a:lstStyle/>
+          <a:p>
+            <a:r>
+              <a:rPr kumimoji="0" lang="en-US"/>
               <a:t>Click to edit Master title style</a:t>
             </a:r>
-            <a:endParaRPr kumimoji="0" lang="en-US"/>
           </a:p>
         </p:txBody>
       </p:sp>
@@ -2405,35 +2358,35 @@
           <a:p>
             <a:pPr lvl="0" eaLnBrk="1" latinLnBrk="0" hangingPunct="1"/>
             <a:r>
-              <a:rPr lang="en-US" smtClean="0"/>
+              <a:rPr lang="en-US"/>
               <a:t>Click to edit Master text styles</a:t>
             </a:r>
           </a:p>
           <a:p>
             <a:pPr lvl="1" eaLnBrk="1" latinLnBrk="0" hangingPunct="1"/>
             <a:r>
-              <a:rPr lang="en-US" smtClean="0"/>
+              <a:rPr lang="en-US"/>
               <a:t>Second level</a:t>
             </a:r>
           </a:p>
           <a:p>
             <a:pPr lvl="2" eaLnBrk="1" latinLnBrk="0" hangingPunct="1"/>
             <a:r>
-              <a:rPr lang="en-US" smtClean="0"/>
+              <a:rPr lang="en-US"/>
               <a:t>Third level</a:t>
             </a:r>
           </a:p>
           <a:p>
             <a:pPr lvl="3" eaLnBrk="1" latinLnBrk="0" hangingPunct="1"/>
             <a:r>
-              <a:rPr lang="en-US" smtClean="0"/>
+              <a:rPr lang="en-US"/>
               <a:t>Fourth level</a:t>
             </a:r>
           </a:p>
           <a:p>
             <a:pPr lvl="4" eaLnBrk="1" latinLnBrk="0" hangingPunct="1"/>
             <a:r>
-              <a:rPr lang="en-US" smtClean="0"/>
+              <a:rPr lang="en-US"/>
               <a:t>Fifth level</a:t>
             </a:r>
             <a:endParaRPr kumimoji="0" lang="en-US"/>
@@ -2479,35 +2432,35 @@
           <a:p>
             <a:pPr lvl="0" eaLnBrk="1" latinLnBrk="0" hangingPunct="1"/>
             <a:r>
-              <a:rPr lang="en-US" smtClean="0"/>
+              <a:rPr lang="en-US"/>
               <a:t>Click to edit Master text styles</a:t>
             </a:r>
           </a:p>
           <a:p>
             <a:pPr lvl="1" eaLnBrk="1" latinLnBrk="0" hangingPunct="1"/>
             <a:r>
-              <a:rPr lang="en-US" smtClean="0"/>
+              <a:rPr lang="en-US"/>
               <a:t>Second level</a:t>
             </a:r>
           </a:p>
           <a:p>
             <a:pPr lvl="2" eaLnBrk="1" latinLnBrk="0" hangingPunct="1"/>
             <a:r>
-              <a:rPr lang="en-US" smtClean="0"/>
+              <a:rPr lang="en-US"/>
               <a:t>Third level</a:t>
             </a:r>
           </a:p>
           <a:p>
             <a:pPr lvl="3" eaLnBrk="1" latinLnBrk="0" hangingPunct="1"/>
             <a:r>
-              <a:rPr lang="en-US" smtClean="0"/>
+              <a:rPr lang="en-US"/>
               <a:t>Fourth level</a:t>
             </a:r>
           </a:p>
           <a:p>
             <a:pPr lvl="4" eaLnBrk="1" latinLnBrk="0" hangingPunct="1"/>
             <a:r>
-              <a:rPr lang="en-US" smtClean="0"/>
+              <a:rPr lang="en-US"/>
               <a:t>Fifth level</a:t>
             </a:r>
             <a:endParaRPr kumimoji="0" lang="en-US"/>
@@ -2527,13 +2480,11 @@
         <p:spPr/>
         <p:txBody>
           <a:bodyPr/>
-          <a:lstStyle>
-            <a:extLst/>
-          </a:lstStyle>
+          <a:lstStyle/>
           <a:p>
             <a:fld id="{B3FD8B5B-8A46-412C-A2D2-8F2B1B2EC62B}" type="datetime1">
               <a:rPr lang="en-US" smtClean="0"/>
-              <a:t>8/19/2024</a:t>
+              <a:t>12/27/2025</a:t>
             </a:fld>
             <a:endParaRPr lang="en-US"/>
           </a:p>
@@ -2552,15 +2503,12 @@
         <p:spPr/>
         <p:txBody>
           <a:bodyPr/>
-          <a:lstStyle>
-            <a:extLst/>
-          </a:lstStyle>
-          <a:p>
-            <a:r>
-              <a:rPr lang="en-US" smtClean="0"/>
+          <a:lstStyle/>
+          <a:p>
+            <a:r>
+              <a:rPr lang="en-US"/>
               <a:t>Memory-Mapped SPM</a:t>
             </a:r>
-            <a:endParaRPr lang="en-US"/>
           </a:p>
         </p:txBody>
       </p:sp>
@@ -2577,9 +2525,7 @@
         <p:spPr/>
         <p:txBody>
           <a:bodyPr/>
-          <a:lstStyle>
-            <a:extLst/>
-          </a:lstStyle>
+          <a:lstStyle/>
           <a:p>
             <a:fld id="{B6F15528-21DE-4FAA-801E-634DDDAF4B2B}" type="slidenum">
               <a:rPr lang="en-US" smtClean="0"/>
@@ -2641,10 +2587,9 @@
           </a:lstStyle>
           <a:p>
             <a:r>
-              <a:rPr kumimoji="0" lang="en-US" smtClean="0"/>
+              <a:rPr kumimoji="0" lang="en-US"/>
               <a:t>Click to edit Master title style</a:t>
             </a:r>
-            <a:endParaRPr kumimoji="0" lang="en-US"/>
           </a:p>
         </p:txBody>
       </p:sp>
@@ -2696,7 +2641,7 @@
           <a:p>
             <a:pPr lvl="0" eaLnBrk="1" latinLnBrk="0" hangingPunct="1"/>
             <a:r>
-              <a:rPr kumimoji="0" lang="en-US" smtClean="0"/>
+              <a:rPr kumimoji="0" lang="en-US"/>
               <a:t>Click to edit Master text styles</a:t>
             </a:r>
           </a:p>
@@ -2750,7 +2695,7 @@
           <a:p>
             <a:pPr lvl="0" eaLnBrk="1" latinLnBrk="0" hangingPunct="1"/>
             <a:r>
-              <a:rPr kumimoji="0" lang="en-US" smtClean="0"/>
+              <a:rPr kumimoji="0" lang="en-US"/>
               <a:t>Click to edit Master text styles</a:t>
             </a:r>
           </a:p>
@@ -2795,35 +2740,35 @@
           <a:p>
             <a:pPr lvl="0" eaLnBrk="1" latinLnBrk="0" hangingPunct="1"/>
             <a:r>
-              <a:rPr lang="en-US" smtClean="0"/>
+              <a:rPr lang="en-US"/>
               <a:t>Click to edit Master text styles</a:t>
             </a:r>
           </a:p>
           <a:p>
             <a:pPr lvl="1" eaLnBrk="1" latinLnBrk="0" hangingPunct="1"/>
             <a:r>
-              <a:rPr lang="en-US" smtClean="0"/>
+              <a:rPr lang="en-US"/>
               <a:t>Second level</a:t>
             </a:r>
           </a:p>
           <a:p>
             <a:pPr lvl="2" eaLnBrk="1" latinLnBrk="0" hangingPunct="1"/>
             <a:r>
-              <a:rPr lang="en-US" smtClean="0"/>
+              <a:rPr lang="en-US"/>
               <a:t>Third level</a:t>
             </a:r>
           </a:p>
           <a:p>
             <a:pPr lvl="3" eaLnBrk="1" latinLnBrk="0" hangingPunct="1"/>
             <a:r>
-              <a:rPr lang="en-US" smtClean="0"/>
+              <a:rPr lang="en-US"/>
               <a:t>Fourth level</a:t>
             </a:r>
           </a:p>
           <a:p>
             <a:pPr lvl="4" eaLnBrk="1" latinLnBrk="0" hangingPunct="1"/>
             <a:r>
-              <a:rPr lang="en-US" smtClean="0"/>
+              <a:rPr lang="en-US"/>
               <a:t>Fifth level</a:t>
             </a:r>
             <a:endParaRPr kumimoji="0" lang="en-US"/>
@@ -2869,35 +2814,35 @@
           <a:p>
             <a:pPr lvl="0" eaLnBrk="1" latinLnBrk="0" hangingPunct="1"/>
             <a:r>
-              <a:rPr lang="en-US" smtClean="0"/>
+              <a:rPr lang="en-US"/>
               <a:t>Click to edit Master text styles</a:t>
             </a:r>
           </a:p>
           <a:p>
             <a:pPr lvl="1" eaLnBrk="1" latinLnBrk="0" hangingPunct="1"/>
             <a:r>
-              <a:rPr lang="en-US" smtClean="0"/>
+              <a:rPr lang="en-US"/>
               <a:t>Second level</a:t>
             </a:r>
           </a:p>
           <a:p>
             <a:pPr lvl="2" eaLnBrk="1" latinLnBrk="0" hangingPunct="1"/>
             <a:r>
-              <a:rPr lang="en-US" smtClean="0"/>
+              <a:rPr lang="en-US"/>
               <a:t>Third level</a:t>
             </a:r>
           </a:p>
           <a:p>
             <a:pPr lvl="3" eaLnBrk="1" latinLnBrk="0" hangingPunct="1"/>
             <a:r>
-              <a:rPr lang="en-US" smtClean="0"/>
+              <a:rPr lang="en-US"/>
               <a:t>Fourth level</a:t>
             </a:r>
           </a:p>
           <a:p>
             <a:pPr lvl="4" eaLnBrk="1" latinLnBrk="0" hangingPunct="1"/>
             <a:r>
-              <a:rPr lang="en-US" smtClean="0"/>
+              <a:rPr lang="en-US"/>
               <a:t>Fifth level</a:t>
             </a:r>
             <a:endParaRPr kumimoji="0" lang="en-US"/>
@@ -2917,13 +2862,11 @@
         <p:spPr/>
         <p:txBody>
           <a:bodyPr/>
-          <a:lstStyle>
-            <a:extLst/>
-          </a:lstStyle>
+          <a:lstStyle/>
           <a:p>
             <a:fld id="{3D72D1A0-E9CE-4C54-8D41-8DBB9F509117}" type="datetime1">
               <a:rPr lang="en-US" smtClean="0"/>
-              <a:t>8/19/2024</a:t>
+              <a:t>12/27/2025</a:t>
             </a:fld>
             <a:endParaRPr lang="en-US"/>
           </a:p>
@@ -2942,15 +2885,12 @@
         <p:spPr/>
         <p:txBody>
           <a:bodyPr/>
-          <a:lstStyle>
-            <a:extLst/>
-          </a:lstStyle>
-          <a:p>
-            <a:r>
-              <a:rPr lang="en-US" smtClean="0"/>
+          <a:lstStyle/>
+          <a:p>
+            <a:r>
+              <a:rPr lang="en-US"/>
               <a:t>Memory-Mapped SPM</a:t>
             </a:r>
-            <a:endParaRPr lang="en-US"/>
           </a:p>
         </p:txBody>
       </p:sp>
@@ -2967,9 +2907,7 @@
         <p:spPr/>
         <p:txBody>
           <a:bodyPr/>
-          <a:lstStyle>
-            <a:extLst/>
-          </a:lstStyle>
+          <a:lstStyle/>
           <a:p>
             <a:fld id="{B6F15528-21DE-4FAA-801E-634DDDAF4B2B}" type="slidenum">
               <a:rPr lang="en-US" smtClean="0"/>
@@ -3018,15 +2956,12 @@
         <p:spPr/>
         <p:txBody>
           <a:bodyPr/>
-          <a:lstStyle>
-            <a:extLst/>
-          </a:lstStyle>
-          <a:p>
-            <a:r>
-              <a:rPr kumimoji="0" lang="en-US" smtClean="0"/>
+          <a:lstStyle/>
+          <a:p>
+            <a:r>
+              <a:rPr kumimoji="0" lang="en-US"/>
               <a:t>Click to edit Master title style</a:t>
             </a:r>
-            <a:endParaRPr kumimoji="0" lang="en-US"/>
           </a:p>
         </p:txBody>
       </p:sp>
@@ -3043,13 +2978,11 @@
         <p:spPr/>
         <p:txBody>
           <a:bodyPr/>
-          <a:lstStyle>
-            <a:extLst/>
-          </a:lstStyle>
+          <a:lstStyle/>
           <a:p>
             <a:fld id="{5384E1B4-9FAF-4C2A-A5AC-8C7F175CBD59}" type="datetime1">
               <a:rPr lang="en-US" smtClean="0"/>
-              <a:t>8/19/2024</a:t>
+              <a:t>12/27/2025</a:t>
             </a:fld>
             <a:endParaRPr lang="en-US"/>
           </a:p>
@@ -3068,15 +3001,12 @@
         <p:spPr/>
         <p:txBody>
           <a:bodyPr/>
-          <a:lstStyle>
-            <a:extLst/>
-          </a:lstStyle>
-          <a:p>
-            <a:r>
-              <a:rPr lang="en-US" smtClean="0"/>
+          <a:lstStyle/>
+          <a:p>
+            <a:r>
+              <a:rPr lang="en-US"/>
               <a:t>Memory-Mapped SPM</a:t>
             </a:r>
-            <a:endParaRPr lang="en-US"/>
           </a:p>
         </p:txBody>
       </p:sp>
@@ -3093,9 +3023,7 @@
         <p:spPr/>
         <p:txBody>
           <a:bodyPr/>
-          <a:lstStyle>
-            <a:extLst/>
-          </a:lstStyle>
+          <a:lstStyle/>
           <a:p>
             <a:fld id="{B6F15528-21DE-4FAA-801E-634DDDAF4B2B}" type="slidenum">
               <a:rPr lang="en-US" smtClean="0"/>
@@ -3206,9 +3134,7 @@
         </p:style>
         <p:txBody>
           <a:bodyPr anchor="ctr"/>
-          <a:lstStyle>
-            <a:extLst/>
-          </a:lstStyle>
+          <a:lstStyle/>
           <a:p>
             <a:pPr algn="ctr" eaLnBrk="1" latinLnBrk="0" hangingPunct="1"/>
             <a:endParaRPr kumimoji="0" lang="en-US"/>
@@ -3228,13 +3154,11 @@
         <p:spPr/>
         <p:txBody>
           <a:bodyPr/>
-          <a:lstStyle>
-            <a:extLst/>
-          </a:lstStyle>
+          <a:lstStyle/>
           <a:p>
             <a:fld id="{E2306DEF-8BC5-4D1A-A84F-BC32AA802BDD}" type="datetime1">
               <a:rPr lang="en-US" smtClean="0"/>
-              <a:t>8/19/2024</a:t>
+              <a:t>12/27/2025</a:t>
             </a:fld>
             <a:endParaRPr lang="en-US"/>
           </a:p>
@@ -3253,15 +3177,12 @@
         <p:spPr/>
         <p:txBody>
           <a:bodyPr/>
-          <a:lstStyle>
-            <a:extLst/>
-          </a:lstStyle>
-          <a:p>
-            <a:r>
-              <a:rPr lang="en-US" smtClean="0"/>
+          <a:lstStyle/>
+          <a:p>
+            <a:r>
+              <a:rPr lang="en-US"/>
               <a:t>Memory-Mapped SPM</a:t>
             </a:r>
-            <a:endParaRPr lang="en-US"/>
           </a:p>
         </p:txBody>
       </p:sp>
@@ -3278,9 +3199,7 @@
         <p:spPr/>
         <p:txBody>
           <a:bodyPr/>
-          <a:lstStyle>
-            <a:extLst/>
-          </a:lstStyle>
+          <a:lstStyle/>
           <a:p>
             <a:fld id="{B6F15528-21DE-4FAA-801E-634DDDAF4B2B}" type="slidenum">
               <a:rPr lang="en-US" smtClean="0"/>
@@ -3347,10 +3266,9 @@
           </a:lstStyle>
           <a:p>
             <a:r>
-              <a:rPr kumimoji="0" lang="en-US" smtClean="0"/>
+              <a:rPr kumimoji="0" lang="en-US"/>
               <a:t>Click to edit Master title style</a:t>
             </a:r>
-            <a:endParaRPr kumimoji="0" lang="en-US"/>
           </a:p>
         </p:txBody>
       </p:sp>
@@ -3421,35 +3339,35 @@
           <a:p>
             <a:pPr lvl="0" eaLnBrk="1" latinLnBrk="0" hangingPunct="1"/>
             <a:r>
-              <a:rPr lang="en-US" smtClean="0"/>
+              <a:rPr lang="en-US"/>
               <a:t>Click to edit Master text styles</a:t>
             </a:r>
           </a:p>
           <a:p>
             <a:pPr lvl="1" eaLnBrk="1" latinLnBrk="0" hangingPunct="1"/>
             <a:r>
-              <a:rPr lang="en-US" smtClean="0"/>
+              <a:rPr lang="en-US"/>
               <a:t>Second level</a:t>
             </a:r>
           </a:p>
           <a:p>
             <a:pPr lvl="2" eaLnBrk="1" latinLnBrk="0" hangingPunct="1"/>
             <a:r>
-              <a:rPr lang="en-US" smtClean="0"/>
+              <a:rPr lang="en-US"/>
               <a:t>Third level</a:t>
             </a:r>
           </a:p>
           <a:p>
             <a:pPr lvl="3" eaLnBrk="1" latinLnBrk="0" hangingPunct="1"/>
             <a:r>
-              <a:rPr lang="en-US" smtClean="0"/>
+              <a:rPr lang="en-US"/>
               <a:t>Fourth level</a:t>
             </a:r>
           </a:p>
           <a:p>
             <a:pPr lvl="4" eaLnBrk="1" latinLnBrk="0" hangingPunct="1"/>
             <a:r>
-              <a:rPr lang="en-US" smtClean="0"/>
+              <a:rPr lang="en-US"/>
               <a:t>Fifth level</a:t>
             </a:r>
             <a:endParaRPr kumimoji="0" lang="en-US"/>
@@ -3519,35 +3437,35 @@
           <a:p>
             <a:pPr lvl="0" eaLnBrk="1" latinLnBrk="0" hangingPunct="1"/>
             <a:r>
-              <a:rPr lang="en-US" smtClean="0"/>
+              <a:rPr lang="en-US"/>
               <a:t>Click to edit Master text styles</a:t>
             </a:r>
           </a:p>
           <a:p>
             <a:pPr lvl="1" eaLnBrk="1" latinLnBrk="0" hangingPunct="1"/>
             <a:r>
-              <a:rPr lang="en-US" smtClean="0"/>
+              <a:rPr lang="en-US"/>
               <a:t>Second level</a:t>
             </a:r>
           </a:p>
           <a:p>
             <a:pPr lvl="2" eaLnBrk="1" latinLnBrk="0" hangingPunct="1"/>
             <a:r>
-              <a:rPr lang="en-US" smtClean="0"/>
+              <a:rPr lang="en-US"/>
               <a:t>Third level</a:t>
             </a:r>
           </a:p>
           <a:p>
             <a:pPr lvl="3" eaLnBrk="1" latinLnBrk="0" hangingPunct="1"/>
             <a:r>
-              <a:rPr lang="en-US" smtClean="0"/>
+              <a:rPr lang="en-US"/>
               <a:t>Fourth level</a:t>
             </a:r>
           </a:p>
           <a:p>
             <a:pPr lvl="4" eaLnBrk="1" latinLnBrk="0" hangingPunct="1"/>
             <a:r>
-              <a:rPr lang="en-US" smtClean="0"/>
+              <a:rPr lang="en-US"/>
               <a:t>Fifth level</a:t>
             </a:r>
             <a:endParaRPr kumimoji="0" lang="en-US"/>
@@ -3567,13 +3485,11 @@
         <p:spPr/>
         <p:txBody>
           <a:bodyPr/>
-          <a:lstStyle>
-            <a:extLst/>
-          </a:lstStyle>
+          <a:lstStyle/>
           <a:p>
             <a:fld id="{628B8A3B-8A96-493A-9055-E95E174A1B57}" type="datetime1">
               <a:rPr lang="en-US" smtClean="0"/>
-              <a:t>8/19/2024</a:t>
+              <a:t>12/27/2025</a:t>
             </a:fld>
             <a:endParaRPr lang="en-US"/>
           </a:p>
@@ -3592,15 +3508,12 @@
         <p:spPr/>
         <p:txBody>
           <a:bodyPr/>
-          <a:lstStyle>
-            <a:extLst/>
-          </a:lstStyle>
-          <a:p>
-            <a:r>
-              <a:rPr lang="en-US" smtClean="0"/>
+          <a:lstStyle/>
+          <a:p>
+            <a:r>
+              <a:rPr lang="en-US"/>
               <a:t>Memory-Mapped SPM</a:t>
             </a:r>
-            <a:endParaRPr lang="en-US"/>
           </a:p>
         </p:txBody>
       </p:sp>
@@ -3617,9 +3530,7 @@
         <p:spPr/>
         <p:txBody>
           <a:bodyPr/>
-          <a:lstStyle>
-            <a:extLst/>
-          </a:lstStyle>
+          <a:lstStyle/>
           <a:p>
             <a:fld id="{B6F15528-21DE-4FAA-801E-634DDDAF4B2B}" type="slidenum">
               <a:rPr lang="en-US" smtClean="0"/>
@@ -3685,10 +3596,9 @@
           </a:lstStyle>
           <a:p>
             <a:r>
-              <a:rPr lang="en-US" smtClean="0"/>
+              <a:rPr lang="en-US"/>
               <a:t>Click to edit Master title style</a:t>
             </a:r>
-            <a:endParaRPr lang="en-US"/>
           </a:p>
         </p:txBody>
       </p:sp>
@@ -3745,38 +3655,37 @@
           <a:p>
             <a:pPr lvl="0"/>
             <a:r>
-              <a:rPr lang="en-US" smtClean="0"/>
+              <a:rPr lang="en-US"/>
               <a:t>Click to edit Master text styles</a:t>
             </a:r>
           </a:p>
           <a:p>
             <a:pPr lvl="1"/>
             <a:r>
-              <a:rPr lang="en-US" smtClean="0"/>
+              <a:rPr lang="en-US"/>
               <a:t>Second level</a:t>
             </a:r>
           </a:p>
           <a:p>
             <a:pPr lvl="2"/>
             <a:r>
-              <a:rPr lang="en-US" smtClean="0"/>
+              <a:rPr lang="en-US"/>
               <a:t>Third level</a:t>
             </a:r>
           </a:p>
           <a:p>
             <a:pPr lvl="3"/>
             <a:r>
-              <a:rPr lang="en-US" smtClean="0"/>
+              <a:rPr lang="en-US"/>
               <a:t>Fourth level</a:t>
             </a:r>
           </a:p>
           <a:p>
             <a:pPr lvl="4"/>
             <a:r>
-              <a:rPr lang="en-US" smtClean="0"/>
+              <a:rPr lang="en-US"/>
               <a:t>Fifth level</a:t>
             </a:r>
-            <a:endParaRPr lang="en-US"/>
           </a:p>
         </p:txBody>
       </p:sp>
@@ -3812,7 +3721,7 @@
           <a:p>
             <a:pPr rtl="1"/>
             <a:r>
-              <a:rPr lang="en-US" dirty="0" smtClean="0">
+              <a:rPr lang="en-US" dirty="0">
                 <a:cs typeface="B Titr" panose="00000700000000000000" pitchFamily="2" charset="-78"/>
               </a:rPr>
               <a:t>Microprocessors and Assembly Language, Fall 2024, AUT, Tehran, Iran </a:t>
@@ -3870,13 +3779,6 @@
   <p:clrMapOvr>
     <a:masterClrMapping/>
   </p:clrMapOvr>
-  <p:timing>
-    <p:tnLst>
-      <p:par>
-        <p:cTn id="1" dur="indefinite" restart="never" nodeType="tmRoot"/>
-      </p:par>
-    </p:tnLst>
-  </p:timing>
 </p:sldLayout>
 </file>
 
@@ -3972,9 +3874,7 @@
         </p:style>
         <p:txBody>
           <a:bodyPr anchor="ctr"/>
-          <a:lstStyle>
-            <a:extLst/>
-          </a:lstStyle>
+          <a:lstStyle/>
           <a:p>
             <a:pPr algn="ctr" eaLnBrk="1" latinLnBrk="0" hangingPunct="1"/>
             <a:endParaRPr kumimoji="0" lang="en-US"/>
@@ -4022,9 +3922,7 @@
         </p:style>
         <p:txBody>
           <a:bodyPr anchor="ctr"/>
-          <a:lstStyle>
-            <a:extLst/>
-          </a:lstStyle>
+          <a:lstStyle/>
           <a:p>
             <a:pPr algn="ctr" eaLnBrk="1" latinLnBrk="0" hangingPunct="1"/>
             <a:endParaRPr kumimoji="0" lang="en-US"/>
@@ -4065,10 +3963,9 @@
           </a:lstStyle>
           <a:p>
             <a:r>
-              <a:rPr kumimoji="0" lang="en-US" smtClean="0"/>
+              <a:rPr kumimoji="0" lang="en-US"/>
               <a:t>Click to edit Master title style</a:t>
             </a:r>
-            <a:endParaRPr kumimoji="0" lang="en-US"/>
           </a:p>
         </p:txBody>
       </p:sp>
@@ -4135,35 +4032,35 @@
           <a:p>
             <a:pPr lvl="0" eaLnBrk="1" latinLnBrk="0" hangingPunct="1"/>
             <a:r>
-              <a:rPr lang="en-US" smtClean="0"/>
+              <a:rPr lang="en-US"/>
               <a:t>Click to edit Master text styles</a:t>
             </a:r>
           </a:p>
           <a:p>
             <a:pPr lvl="1" eaLnBrk="1" latinLnBrk="0" hangingPunct="1"/>
             <a:r>
-              <a:rPr lang="en-US" smtClean="0"/>
+              <a:rPr lang="en-US"/>
               <a:t>Second level</a:t>
             </a:r>
           </a:p>
           <a:p>
             <a:pPr lvl="2" eaLnBrk="1" latinLnBrk="0" hangingPunct="1"/>
             <a:r>
-              <a:rPr lang="en-US" smtClean="0"/>
+              <a:rPr lang="en-US"/>
               <a:t>Third level</a:t>
             </a:r>
           </a:p>
           <a:p>
             <a:pPr lvl="3" eaLnBrk="1" latinLnBrk="0" hangingPunct="1"/>
             <a:r>
-              <a:rPr lang="en-US" smtClean="0"/>
+              <a:rPr lang="en-US"/>
               <a:t>Fourth level</a:t>
             </a:r>
           </a:p>
           <a:p>
             <a:pPr lvl="4" eaLnBrk="1" latinLnBrk="0" hangingPunct="1"/>
             <a:r>
-              <a:rPr lang="en-US" smtClean="0"/>
+              <a:rPr lang="en-US"/>
               <a:t>Fifth level</a:t>
             </a:r>
             <a:endParaRPr kumimoji="0" lang="en-US"/>
@@ -4183,13 +4080,11 @@
         <p:spPr/>
         <p:txBody>
           <a:bodyPr/>
-          <a:lstStyle>
-            <a:extLst/>
-          </a:lstStyle>
+          <a:lstStyle/>
           <a:p>
             <a:fld id="{793F6010-06C4-4772-A873-F0169484628B}" type="datetime1">
               <a:rPr lang="en-US" smtClean="0"/>
-              <a:t>8/19/2024</a:t>
+              <a:t>12/27/2025</a:t>
             </a:fld>
             <a:endParaRPr lang="en-US"/>
           </a:p>
@@ -4208,15 +4103,12 @@
         <p:spPr/>
         <p:txBody>
           <a:bodyPr/>
-          <a:lstStyle>
-            <a:extLst/>
-          </a:lstStyle>
-          <a:p>
-            <a:r>
-              <a:rPr lang="en-US" smtClean="0"/>
+          <a:lstStyle/>
+          <a:p>
+            <a:r>
+              <a:rPr lang="en-US"/>
               <a:t>Memory-Mapped SPM</a:t>
             </a:r>
-            <a:endParaRPr lang="en-US"/>
           </a:p>
         </p:txBody>
       </p:sp>
@@ -4233,9 +4125,7 @@
         <p:spPr/>
         <p:txBody>
           <a:bodyPr/>
-          <a:lstStyle>
-            <a:extLst/>
-          </a:lstStyle>
+          <a:lstStyle/>
           <a:p>
             <a:fld id="{B6F15528-21DE-4FAA-801E-634DDDAF4B2B}" type="slidenum">
               <a:rPr lang="en-US" smtClean="0"/>
@@ -4284,10 +4174,9 @@
           </a:lstStyle>
           <a:p>
             <a:r>
-              <a:rPr kumimoji="0" lang="en-US" smtClean="0"/>
+              <a:rPr kumimoji="0" lang="en-US"/>
               <a:t>Click icon to add picture</a:t>
             </a:r>
-            <a:endParaRPr kumimoji="0" lang="en-US"/>
           </a:p>
         </p:txBody>
       </p:sp>
@@ -4334,15 +4223,12 @@
         </p:spPr>
         <p:txBody>
           <a:bodyPr/>
-          <a:lstStyle>
-            <a:extLst/>
-          </a:lstStyle>
-          <a:p>
-            <a:r>
-              <a:rPr kumimoji="0" lang="en-US" smtClean="0"/>
+          <a:lstStyle/>
+          <a:p>
+            <a:r>
+              <a:rPr kumimoji="0" lang="en-US"/>
               <a:t>Click to edit Master title style</a:t>
             </a:r>
-            <a:endParaRPr kumimoji="0" lang="en-US"/>
           </a:p>
         </p:txBody>
       </p:sp>
@@ -4364,41 +4250,39 @@
         </p:spPr>
         <p:txBody>
           <a:bodyPr vert="eaVert"/>
-          <a:lstStyle>
-            <a:extLst/>
-          </a:lstStyle>
+          <a:lstStyle/>
           <a:p>
             <a:pPr lvl="0" eaLnBrk="1" latinLnBrk="0" hangingPunct="1"/>
             <a:r>
-              <a:rPr lang="en-US" smtClean="0"/>
+              <a:rPr lang="en-US"/>
               <a:t>Click to edit Master text styles</a:t>
             </a:r>
           </a:p>
           <a:p>
             <a:pPr lvl="1" eaLnBrk="1" latinLnBrk="0" hangingPunct="1"/>
             <a:r>
-              <a:rPr lang="en-US" smtClean="0"/>
+              <a:rPr lang="en-US"/>
               <a:t>Second level</a:t>
             </a:r>
           </a:p>
           <a:p>
             <a:pPr lvl="2" eaLnBrk="1" latinLnBrk="0" hangingPunct="1"/>
             <a:r>
-              <a:rPr lang="en-US" smtClean="0"/>
+              <a:rPr lang="en-US"/>
               <a:t>Third level</a:t>
             </a:r>
           </a:p>
           <a:p>
             <a:pPr lvl="3" eaLnBrk="1" latinLnBrk="0" hangingPunct="1"/>
             <a:r>
-              <a:rPr lang="en-US" smtClean="0"/>
+              <a:rPr lang="en-US"/>
               <a:t>Fourth level</a:t>
             </a:r>
           </a:p>
           <a:p>
             <a:pPr lvl="4" eaLnBrk="1" latinLnBrk="0" hangingPunct="1"/>
             <a:r>
-              <a:rPr lang="en-US" smtClean="0"/>
+              <a:rPr lang="en-US"/>
               <a:t>Fifth level</a:t>
             </a:r>
             <a:endParaRPr kumimoji="0" lang="en-US"/>
@@ -4418,13 +4302,11 @@
         <p:spPr/>
         <p:txBody>
           <a:bodyPr/>
-          <a:lstStyle>
-            <a:extLst/>
-          </a:lstStyle>
+          <a:lstStyle/>
           <a:p>
             <a:fld id="{9D38C875-1C6F-4BBA-A49D-A655DE5157F6}" type="datetime1">
               <a:rPr lang="en-US" smtClean="0"/>
-              <a:t>8/19/2024</a:t>
+              <a:t>12/27/2025</a:t>
             </a:fld>
             <a:endParaRPr lang="en-US"/>
           </a:p>
@@ -4443,15 +4325,12 @@
         <p:spPr/>
         <p:txBody>
           <a:bodyPr/>
-          <a:lstStyle>
-            <a:extLst/>
-          </a:lstStyle>
-          <a:p>
-            <a:r>
-              <a:rPr lang="en-US" smtClean="0"/>
+          <a:lstStyle/>
+          <a:p>
+            <a:r>
+              <a:rPr lang="en-US"/>
               <a:t>Memory-Mapped SPM</a:t>
             </a:r>
-            <a:endParaRPr lang="en-US"/>
           </a:p>
         </p:txBody>
       </p:sp>
@@ -4468,9 +4347,7 @@
         <p:spPr/>
         <p:txBody>
           <a:bodyPr/>
-          <a:lstStyle>
-            <a:extLst/>
-          </a:lstStyle>
+          <a:lstStyle/>
           <a:p>
             <a:fld id="{B6F15528-21DE-4FAA-801E-634DDDAF4B2B}" type="slidenum">
               <a:rPr lang="en-US" smtClean="0"/>
@@ -4524,15 +4401,12 @@
         </p:spPr>
         <p:txBody>
           <a:bodyPr vert="eaVert"/>
-          <a:lstStyle>
-            <a:extLst/>
-          </a:lstStyle>
-          <a:p>
-            <a:r>
-              <a:rPr kumimoji="0" lang="en-US" smtClean="0"/>
+          <a:lstStyle/>
+          <a:p>
+            <a:r>
+              <a:rPr kumimoji="0" lang="en-US"/>
               <a:t>Click to edit Master title style</a:t>
             </a:r>
-            <a:endParaRPr kumimoji="0" lang="en-US"/>
           </a:p>
         </p:txBody>
       </p:sp>
@@ -4554,41 +4428,39 @@
         </p:spPr>
         <p:txBody>
           <a:bodyPr vert="eaVert"/>
-          <a:lstStyle>
-            <a:extLst/>
-          </a:lstStyle>
+          <a:lstStyle/>
           <a:p>
             <a:pPr lvl="0" eaLnBrk="1" latinLnBrk="0" hangingPunct="1"/>
             <a:r>
-              <a:rPr lang="en-US" smtClean="0"/>
+              <a:rPr lang="en-US"/>
               <a:t>Click to edit Master text styles</a:t>
             </a:r>
           </a:p>
           <a:p>
             <a:pPr lvl="1" eaLnBrk="1" latinLnBrk="0" hangingPunct="1"/>
             <a:r>
-              <a:rPr lang="en-US" smtClean="0"/>
+              <a:rPr lang="en-US"/>
               <a:t>Second level</a:t>
             </a:r>
           </a:p>
           <a:p>
             <a:pPr lvl="2" eaLnBrk="1" latinLnBrk="0" hangingPunct="1"/>
             <a:r>
-              <a:rPr lang="en-US" smtClean="0"/>
+              <a:rPr lang="en-US"/>
               <a:t>Third level</a:t>
             </a:r>
           </a:p>
           <a:p>
             <a:pPr lvl="3" eaLnBrk="1" latinLnBrk="0" hangingPunct="1"/>
             <a:r>
-              <a:rPr lang="en-US" smtClean="0"/>
+              <a:rPr lang="en-US"/>
               <a:t>Fourth level</a:t>
             </a:r>
           </a:p>
           <a:p>
             <a:pPr lvl="4" eaLnBrk="1" latinLnBrk="0" hangingPunct="1"/>
             <a:r>
-              <a:rPr lang="en-US" smtClean="0"/>
+              <a:rPr lang="en-US"/>
               <a:t>Fifth level</a:t>
             </a:r>
             <a:endParaRPr kumimoji="0" lang="en-US"/>
@@ -4608,13 +4480,11 @@
         <p:spPr/>
         <p:txBody>
           <a:bodyPr/>
-          <a:lstStyle>
-            <a:extLst/>
-          </a:lstStyle>
+          <a:lstStyle/>
           <a:p>
             <a:fld id="{05A7C28B-237A-4A16-A330-F744D93506D6}" type="datetime1">
               <a:rPr lang="en-US" smtClean="0"/>
-              <a:t>8/19/2024</a:t>
+              <a:t>12/27/2025</a:t>
             </a:fld>
             <a:endParaRPr lang="en-US"/>
           </a:p>
@@ -4633,15 +4503,12 @@
         <p:spPr/>
         <p:txBody>
           <a:bodyPr/>
-          <a:lstStyle>
-            <a:extLst/>
-          </a:lstStyle>
-          <a:p>
-            <a:r>
-              <a:rPr lang="en-US" smtClean="0"/>
+          <a:lstStyle/>
+          <a:p>
+            <a:r>
+              <a:rPr lang="en-US"/>
               <a:t>Memory-Mapped SPM</a:t>
             </a:r>
-            <a:endParaRPr lang="en-US"/>
           </a:p>
         </p:txBody>
       </p:sp>
@@ -4658,9 +4525,7 @@
         <p:spPr/>
         <p:txBody>
           <a:bodyPr/>
-          <a:lstStyle>
-            <a:extLst/>
-          </a:lstStyle>
+          <a:lstStyle/>
           <a:p>
             <a:fld id="{B6F15528-21DE-4FAA-801E-634DDDAF4B2B}" type="slidenum">
               <a:rPr lang="en-US" smtClean="0"/>
@@ -4721,10 +4586,9 @@
           </a:lstStyle>
           <a:p>
             <a:r>
-              <a:rPr lang="en-US" smtClean="0"/>
+              <a:rPr lang="en-US"/>
               <a:t>Click to edit Master title style</a:t>
             </a:r>
-            <a:endParaRPr lang="en-US"/>
           </a:p>
         </p:txBody>
       </p:sp>
@@ -4841,7 +4705,7 @@
           <a:p>
             <a:pPr lvl="0"/>
             <a:r>
-              <a:rPr lang="en-US" smtClean="0"/>
+              <a:rPr lang="en-US"/>
               <a:t>Click to edit Master text styles</a:t>
             </a:r>
           </a:p>
@@ -4864,7 +4728,7 @@
           <a:p>
             <a:fld id="{945E2AE1-CBD5-460D-A0C9-6147C2D4C470}" type="datetime1">
               <a:rPr lang="en-US" smtClean="0"/>
-              <a:t>8/19/2024</a:t>
+              <a:t>12/27/2025</a:t>
             </a:fld>
             <a:endParaRPr lang="en-US"/>
           </a:p>
@@ -4886,10 +4750,9 @@
           <a:lstStyle/>
           <a:p>
             <a:r>
-              <a:rPr lang="en-US" smtClean="0"/>
+              <a:rPr lang="en-US"/>
               <a:t>Memory-Mapped SPM</a:t>
             </a:r>
-            <a:endParaRPr lang="en-US"/>
           </a:p>
         </p:txBody>
       </p:sp>
@@ -4922,13 +4785,6 @@
   <p:clrMapOvr>
     <a:masterClrMapping/>
   </p:clrMapOvr>
-  <p:timing>
-    <p:tnLst>
-      <p:par>
-        <p:cTn id="1" dur="indefinite" restart="never" nodeType="tmRoot"/>
-      </p:par>
-    </p:tnLst>
-  </p:timing>
 </p:sldLayout>
 </file>
 
@@ -4965,10 +4821,9 @@
           <a:lstStyle/>
           <a:p>
             <a:r>
-              <a:rPr lang="en-US" smtClean="0"/>
+              <a:rPr lang="en-US"/>
               <a:t>Click to edit Master title style</a:t>
             </a:r>
-            <a:endParaRPr lang="en-US"/>
           </a:p>
         </p:txBody>
       </p:sp>
@@ -5022,38 +4877,37 @@
           <a:p>
             <a:pPr lvl="0"/>
             <a:r>
-              <a:rPr lang="en-US" smtClean="0"/>
+              <a:rPr lang="en-US"/>
               <a:t>Click to edit Master text styles</a:t>
             </a:r>
           </a:p>
           <a:p>
             <a:pPr lvl="1"/>
             <a:r>
-              <a:rPr lang="en-US" smtClean="0"/>
+              <a:rPr lang="en-US"/>
               <a:t>Second level</a:t>
             </a:r>
           </a:p>
           <a:p>
             <a:pPr lvl="2"/>
             <a:r>
-              <a:rPr lang="en-US" smtClean="0"/>
+              <a:rPr lang="en-US"/>
               <a:t>Third level</a:t>
             </a:r>
           </a:p>
           <a:p>
             <a:pPr lvl="3"/>
             <a:r>
-              <a:rPr lang="en-US" smtClean="0"/>
+              <a:rPr lang="en-US"/>
               <a:t>Fourth level</a:t>
             </a:r>
           </a:p>
           <a:p>
             <a:pPr lvl="4"/>
             <a:r>
-              <a:rPr lang="en-US" smtClean="0"/>
+              <a:rPr lang="en-US"/>
               <a:t>Fifth level</a:t>
             </a:r>
-            <a:endParaRPr lang="en-US"/>
           </a:p>
         </p:txBody>
       </p:sp>
@@ -5107,38 +4961,37 @@
           <a:p>
             <a:pPr lvl="0"/>
             <a:r>
-              <a:rPr lang="en-US" smtClean="0"/>
+              <a:rPr lang="en-US"/>
               <a:t>Click to edit Master text styles</a:t>
             </a:r>
           </a:p>
           <a:p>
             <a:pPr lvl="1"/>
             <a:r>
-              <a:rPr lang="en-US" smtClean="0"/>
+              <a:rPr lang="en-US"/>
               <a:t>Second level</a:t>
             </a:r>
           </a:p>
           <a:p>
             <a:pPr lvl="2"/>
             <a:r>
-              <a:rPr lang="en-US" smtClean="0"/>
+              <a:rPr lang="en-US"/>
               <a:t>Third level</a:t>
             </a:r>
           </a:p>
           <a:p>
             <a:pPr lvl="3"/>
             <a:r>
-              <a:rPr lang="en-US" smtClean="0"/>
+              <a:rPr lang="en-US"/>
               <a:t>Fourth level</a:t>
             </a:r>
           </a:p>
           <a:p>
             <a:pPr lvl="4"/>
             <a:r>
-              <a:rPr lang="en-US" smtClean="0"/>
+              <a:rPr lang="en-US"/>
               <a:t>Fifth level</a:t>
             </a:r>
-            <a:endParaRPr lang="en-US"/>
           </a:p>
         </p:txBody>
       </p:sp>
@@ -5147,13 +5000,6 @@
   <p:clrMapOvr>
     <a:masterClrMapping/>
   </p:clrMapOvr>
-  <p:timing>
-    <p:tnLst>
-      <p:par>
-        <p:cTn id="1" dur="indefinite" restart="never" nodeType="tmRoot"/>
-      </p:par>
-    </p:tnLst>
-  </p:timing>
 </p:sldLayout>
 </file>
 
@@ -5194,10 +5040,9 @@
           </a:lstStyle>
           <a:p>
             <a:r>
-              <a:rPr lang="en-US" smtClean="0"/>
+              <a:rPr lang="en-US"/>
               <a:t>Click to edit Master title style</a:t>
             </a:r>
-            <a:endParaRPr lang="en-US"/>
           </a:p>
         </p:txBody>
       </p:sp>
@@ -5260,7 +5105,7 @@
           <a:p>
             <a:pPr lvl="0"/>
             <a:r>
-              <a:rPr lang="en-US" smtClean="0"/>
+              <a:rPr lang="en-US"/>
               <a:t>Click to edit Master text styles</a:t>
             </a:r>
           </a:p>
@@ -5316,38 +5161,37 @@
           <a:p>
             <a:pPr lvl="0"/>
             <a:r>
-              <a:rPr lang="en-US" smtClean="0"/>
+              <a:rPr lang="en-US"/>
               <a:t>Click to edit Master text styles</a:t>
             </a:r>
           </a:p>
           <a:p>
             <a:pPr lvl="1"/>
             <a:r>
-              <a:rPr lang="en-US" smtClean="0"/>
+              <a:rPr lang="en-US"/>
               <a:t>Second level</a:t>
             </a:r>
           </a:p>
           <a:p>
             <a:pPr lvl="2"/>
             <a:r>
-              <a:rPr lang="en-US" smtClean="0"/>
+              <a:rPr lang="en-US"/>
               <a:t>Third level</a:t>
             </a:r>
           </a:p>
           <a:p>
             <a:pPr lvl="3"/>
             <a:r>
-              <a:rPr lang="en-US" smtClean="0"/>
+              <a:rPr lang="en-US"/>
               <a:t>Fourth level</a:t>
             </a:r>
           </a:p>
           <a:p>
             <a:pPr lvl="4"/>
             <a:r>
-              <a:rPr lang="en-US" smtClean="0"/>
+              <a:rPr lang="en-US"/>
               <a:t>Fifth level</a:t>
             </a:r>
-            <a:endParaRPr lang="en-US"/>
           </a:p>
         </p:txBody>
       </p:sp>
@@ -5410,7 +5254,7 @@
           <a:p>
             <a:pPr lvl="0"/>
             <a:r>
-              <a:rPr lang="en-US" smtClean="0"/>
+              <a:rPr lang="en-US"/>
               <a:t>Click to edit Master text styles</a:t>
             </a:r>
           </a:p>
@@ -5466,38 +5310,37 @@
           <a:p>
             <a:pPr lvl="0"/>
             <a:r>
-              <a:rPr lang="en-US" smtClean="0"/>
+              <a:rPr lang="en-US"/>
               <a:t>Click to edit Master text styles</a:t>
             </a:r>
           </a:p>
           <a:p>
             <a:pPr lvl="1"/>
             <a:r>
-              <a:rPr lang="en-US" smtClean="0"/>
+              <a:rPr lang="en-US"/>
               <a:t>Second level</a:t>
             </a:r>
           </a:p>
           <a:p>
             <a:pPr lvl="2"/>
             <a:r>
-              <a:rPr lang="en-US" smtClean="0"/>
+              <a:rPr lang="en-US"/>
               <a:t>Third level</a:t>
             </a:r>
           </a:p>
           <a:p>
             <a:pPr lvl="3"/>
             <a:r>
-              <a:rPr lang="en-US" smtClean="0"/>
+              <a:rPr lang="en-US"/>
               <a:t>Fourth level</a:t>
             </a:r>
           </a:p>
           <a:p>
             <a:pPr lvl="4"/>
             <a:r>
-              <a:rPr lang="en-US" smtClean="0"/>
+              <a:rPr lang="en-US"/>
               <a:t>Fifth level</a:t>
             </a:r>
-            <a:endParaRPr lang="en-US"/>
           </a:p>
         </p:txBody>
       </p:sp>
@@ -5518,7 +5361,7 @@
           <a:p>
             <a:fld id="{B2CFB3A9-0A90-4E79-85FA-03828B308331}" type="datetime1">
               <a:rPr lang="en-US" smtClean="0"/>
-              <a:t>8/19/2024</a:t>
+              <a:t>12/27/2025</a:t>
             </a:fld>
             <a:endParaRPr lang="en-US"/>
           </a:p>
@@ -5540,10 +5383,9 @@
           <a:lstStyle/>
           <a:p>
             <a:r>
-              <a:rPr lang="en-US" smtClean="0"/>
+              <a:rPr lang="en-US"/>
               <a:t>Memory-Mapped SPM</a:t>
             </a:r>
-            <a:endParaRPr lang="en-US"/>
           </a:p>
         </p:txBody>
       </p:sp>
@@ -5612,10 +5454,9 @@
           <a:lstStyle/>
           <a:p>
             <a:r>
-              <a:rPr lang="en-US" smtClean="0"/>
+              <a:rPr lang="en-US"/>
               <a:t>Click to edit Master title style</a:t>
             </a:r>
-            <a:endParaRPr lang="en-US"/>
           </a:p>
         </p:txBody>
       </p:sp>
@@ -5636,7 +5477,7 @@
           <a:p>
             <a:fld id="{5BA5B4FA-0F9A-436F-AA41-B89FAC163798}" type="datetime1">
               <a:rPr lang="en-US" smtClean="0"/>
-              <a:t>8/19/2024</a:t>
+              <a:t>12/27/2025</a:t>
             </a:fld>
             <a:endParaRPr lang="en-US"/>
           </a:p>
@@ -5658,10 +5499,9 @@
           <a:lstStyle/>
           <a:p>
             <a:r>
-              <a:rPr lang="en-US" smtClean="0"/>
+              <a:rPr lang="en-US"/>
               <a:t>Memory-Mapped SPM</a:t>
             </a:r>
-            <a:endParaRPr lang="en-US"/>
           </a:p>
         </p:txBody>
       </p:sp>
@@ -5731,7 +5571,7 @@
           <a:p>
             <a:fld id="{B71C8B55-203E-4F94-AE03-50CFB6BD790A}" type="datetime1">
               <a:rPr lang="en-US" smtClean="0"/>
-              <a:t>8/19/2024</a:t>
+              <a:t>12/27/2025</a:t>
             </a:fld>
             <a:endParaRPr lang="en-US"/>
           </a:p>
@@ -5753,10 +5593,9 @@
           <a:lstStyle/>
           <a:p>
             <a:r>
-              <a:rPr lang="en-US" smtClean="0"/>
+              <a:rPr lang="en-US"/>
               <a:t>Memory-Mapped SPM</a:t>
             </a:r>
-            <a:endParaRPr lang="en-US"/>
           </a:p>
         </p:txBody>
       </p:sp>
@@ -5834,10 +5673,9 @@
           </a:lstStyle>
           <a:p>
             <a:r>
-              <a:rPr lang="en-US" smtClean="0"/>
+              <a:rPr lang="en-US"/>
               <a:t>Click to edit Master title style</a:t>
             </a:r>
-            <a:endParaRPr lang="en-US"/>
           </a:p>
         </p:txBody>
       </p:sp>
@@ -5891,38 +5729,37 @@
           <a:p>
             <a:pPr lvl="0"/>
             <a:r>
-              <a:rPr lang="en-US" smtClean="0"/>
+              <a:rPr lang="en-US"/>
               <a:t>Click to edit Master text styles</a:t>
             </a:r>
           </a:p>
           <a:p>
             <a:pPr lvl="1"/>
             <a:r>
-              <a:rPr lang="en-US" smtClean="0"/>
+              <a:rPr lang="en-US"/>
               <a:t>Second level</a:t>
             </a:r>
           </a:p>
           <a:p>
             <a:pPr lvl="2"/>
             <a:r>
-              <a:rPr lang="en-US" smtClean="0"/>
+              <a:rPr lang="en-US"/>
               <a:t>Third level</a:t>
             </a:r>
           </a:p>
           <a:p>
             <a:pPr lvl="3"/>
             <a:r>
-              <a:rPr lang="en-US" smtClean="0"/>
+              <a:rPr lang="en-US"/>
               <a:t>Fourth level</a:t>
             </a:r>
           </a:p>
           <a:p>
             <a:pPr lvl="4"/>
             <a:r>
-              <a:rPr lang="en-US" smtClean="0"/>
+              <a:rPr lang="en-US"/>
               <a:t>Fifth level</a:t>
             </a:r>
-            <a:endParaRPr lang="en-US"/>
           </a:p>
         </p:txBody>
       </p:sp>
@@ -5985,7 +5822,7 @@
           <a:p>
             <a:pPr lvl="0"/>
             <a:r>
-              <a:rPr lang="en-US" smtClean="0"/>
+              <a:rPr lang="en-US"/>
               <a:t>Click to edit Master text styles</a:t>
             </a:r>
           </a:p>
@@ -6008,7 +5845,7 @@
           <a:p>
             <a:fld id="{897536A8-DE7E-4A16-B194-971EA3CF9026}" type="datetime1">
               <a:rPr lang="en-US" smtClean="0"/>
-              <a:t>8/19/2024</a:t>
+              <a:t>12/27/2025</a:t>
             </a:fld>
             <a:endParaRPr lang="en-US"/>
           </a:p>
@@ -6030,10 +5867,9 @@
           <a:lstStyle/>
           <a:p>
             <a:r>
-              <a:rPr lang="en-US" smtClean="0"/>
+              <a:rPr lang="en-US"/>
               <a:t>Memory-Mapped SPM</a:t>
             </a:r>
-            <a:endParaRPr lang="en-US"/>
           </a:p>
         </p:txBody>
       </p:sp>
@@ -6111,10 +5947,9 @@
           </a:lstStyle>
           <a:p>
             <a:r>
-              <a:rPr lang="en-US" smtClean="0"/>
+              <a:rPr lang="en-US"/>
               <a:t>Click to edit Master title style</a:t>
             </a:r>
-            <a:endParaRPr lang="en-US"/>
           </a:p>
         </p:txBody>
       </p:sp>
@@ -6238,7 +6073,7 @@
           <a:p>
             <a:pPr lvl="0"/>
             <a:r>
-              <a:rPr lang="en-US" smtClean="0"/>
+              <a:rPr lang="en-US"/>
               <a:t>Click to edit Master text styles</a:t>
             </a:r>
           </a:p>
@@ -6261,7 +6096,7 @@
           <a:p>
             <a:fld id="{F5C96671-0698-4B48-8CC8-45A9BDA6F14F}" type="datetime1">
               <a:rPr lang="en-US" smtClean="0"/>
-              <a:t>8/19/2024</a:t>
+              <a:t>12/27/2025</a:t>
             </a:fld>
             <a:endParaRPr lang="en-US"/>
           </a:p>
@@ -6283,10 +6118,9 @@
           <a:lstStyle/>
           <a:p>
             <a:r>
-              <a:rPr lang="en-US" smtClean="0"/>
+              <a:rPr lang="en-US"/>
               <a:t>Memory-Mapped SPM</a:t>
             </a:r>
-            <a:endParaRPr lang="en-US"/>
           </a:p>
         </p:txBody>
       </p:sp>
@@ -6379,10 +6213,9 @@
           <a:lstStyle/>
           <a:p>
             <a:r>
-              <a:rPr lang="en-US" smtClean="0"/>
+              <a:rPr lang="en-US"/>
               <a:t>Click to edit Master title style</a:t>
             </a:r>
-            <a:endParaRPr lang="en-US"/>
           </a:p>
         </p:txBody>
       </p:sp>
@@ -6413,38 +6246,37 @@
           <a:p>
             <a:pPr lvl="0"/>
             <a:r>
-              <a:rPr lang="en-US" smtClean="0"/>
+              <a:rPr lang="en-US"/>
               <a:t>Click to edit Master text styles</a:t>
             </a:r>
           </a:p>
           <a:p>
             <a:pPr lvl="1"/>
             <a:r>
-              <a:rPr lang="en-US" smtClean="0"/>
+              <a:rPr lang="en-US"/>
               <a:t>Second level</a:t>
             </a:r>
           </a:p>
           <a:p>
             <a:pPr lvl="2"/>
             <a:r>
-              <a:rPr lang="en-US" smtClean="0"/>
+              <a:rPr lang="en-US"/>
               <a:t>Third level</a:t>
             </a:r>
           </a:p>
           <a:p>
             <a:pPr lvl="3"/>
             <a:r>
-              <a:rPr lang="en-US" smtClean="0"/>
+              <a:rPr lang="en-US"/>
               <a:t>Fourth level</a:t>
             </a:r>
           </a:p>
           <a:p>
             <a:pPr lvl="4"/>
             <a:r>
-              <a:rPr lang="en-US" smtClean="0"/>
+              <a:rPr lang="en-US"/>
               <a:t>Fifth level</a:t>
             </a:r>
-            <a:endParaRPr lang="en-US"/>
           </a:p>
         </p:txBody>
       </p:sp>
@@ -6483,7 +6315,7 @@
           <a:p>
             <a:fld id="{26FAABE3-8527-4979-BA7D-5506EF11427A}" type="datetime1">
               <a:rPr lang="en-US" smtClean="0"/>
-              <a:t>8/19/2024</a:t>
+              <a:t>12/27/2025</a:t>
             </a:fld>
             <a:endParaRPr lang="en-US"/>
           </a:p>
@@ -6523,10 +6355,9 @@
           </a:lstStyle>
           <a:p>
             <a:r>
-              <a:rPr lang="en-US" smtClean="0"/>
+              <a:rPr lang="en-US"/>
               <a:t>Memory-Mapped SPM</a:t>
             </a:r>
-            <a:endParaRPr lang="en-US"/>
           </a:p>
         </p:txBody>
       </p:sp>
@@ -6948,9 +6779,7 @@
         </p:style>
         <p:txBody>
           <a:bodyPr anchor="ctr"/>
-          <a:lstStyle>
-            <a:extLst/>
-          </a:lstStyle>
+          <a:lstStyle/>
           <a:p>
             <a:pPr algn="ctr" eaLnBrk="1" latinLnBrk="0" hangingPunct="1"/>
             <a:endParaRPr kumimoji="0" lang="en-US"/>
@@ -7020,9 +6849,7 @@
         </p:style>
         <p:txBody>
           <a:bodyPr anchor="ctr"/>
-          <a:lstStyle>
-            <a:extLst/>
-          </a:lstStyle>
+          <a:lstStyle/>
           <a:p>
             <a:pPr algn="ctr" eaLnBrk="1" latinLnBrk="0" hangingPunct="1"/>
             <a:endParaRPr kumimoji="0" lang="en-US"/>
@@ -7052,15 +6879,12 @@
           <a:bodyPr vert="horz" anchor="b">
             <a:normAutofit/>
           </a:bodyPr>
-          <a:lstStyle>
-            <a:extLst/>
-          </a:lstStyle>
-          <a:p>
-            <a:r>
-              <a:rPr kumimoji="0" lang="en-US" smtClean="0"/>
+          <a:lstStyle/>
+          <a:p>
+            <a:r>
+              <a:rPr kumimoji="0" lang="en-US"/>
               <a:t>Click to edit Master title style</a:t>
             </a:r>
-            <a:endParaRPr kumimoji="0" lang="en-US"/>
           </a:p>
         </p:txBody>
       </p:sp>
@@ -7087,44 +6911,41 @@
           <a:bodyPr vert="horz" lIns="182880" tIns="91440">
             <a:normAutofit/>
           </a:bodyPr>
-          <a:lstStyle>
-            <a:extLst/>
-          </a:lstStyle>
+          <a:lstStyle/>
           <a:p>
             <a:pPr lvl="0" eaLnBrk="1" latinLnBrk="0" hangingPunct="1"/>
             <a:r>
-              <a:rPr kumimoji="0" lang="en-US" smtClean="0"/>
+              <a:rPr kumimoji="0" lang="en-US"/>
               <a:t>Click to edit Master text styles</a:t>
             </a:r>
           </a:p>
           <a:p>
             <a:pPr lvl="1" eaLnBrk="1" latinLnBrk="0" hangingPunct="1"/>
             <a:r>
-              <a:rPr kumimoji="0" lang="en-US" smtClean="0"/>
+              <a:rPr kumimoji="0" lang="en-US"/>
               <a:t>Second level</a:t>
             </a:r>
           </a:p>
           <a:p>
             <a:pPr lvl="2" eaLnBrk="1" latinLnBrk="0" hangingPunct="1"/>
             <a:r>
-              <a:rPr kumimoji="0" lang="en-US" smtClean="0"/>
+              <a:rPr kumimoji="0" lang="en-US"/>
               <a:t>Third level</a:t>
             </a:r>
           </a:p>
           <a:p>
             <a:pPr lvl="3" eaLnBrk="1" latinLnBrk="0" hangingPunct="1"/>
             <a:r>
-              <a:rPr kumimoji="0" lang="en-US" smtClean="0"/>
+              <a:rPr kumimoji="0" lang="en-US"/>
               <a:t>Fourth level</a:t>
             </a:r>
           </a:p>
           <a:p>
             <a:pPr lvl="4" eaLnBrk="1" latinLnBrk="0" hangingPunct="1"/>
             <a:r>
-              <a:rPr kumimoji="0" lang="en-US" smtClean="0"/>
+              <a:rPr kumimoji="0" lang="en-US"/>
               <a:t>Fifth level</a:t>
             </a:r>
-            <a:endParaRPr kumimoji="0" lang="en-US"/>
           </a:p>
         </p:txBody>
       </p:sp>
@@ -7164,7 +6985,7 @@
           <a:p>
             <a:fld id="{A27B6C89-3F9A-4856-B9C8-0FA30DF0136D}" type="datetime1">
               <a:rPr lang="en-US" smtClean="0"/>
-              <a:t>8/19/2024</a:t>
+              <a:t>12/27/2025</a:t>
             </a:fld>
             <a:endParaRPr lang="en-US"/>
           </a:p>
@@ -7205,10 +7026,9 @@
           </a:lstStyle>
           <a:p>
             <a:r>
-              <a:rPr lang="en-US" smtClean="0"/>
+              <a:rPr lang="en-US"/>
               <a:t>Memory-Mapped SPM</a:t>
             </a:r>
-            <a:endParaRPr lang="en-US"/>
           </a:p>
         </p:txBody>
       </p:sp>
@@ -7668,32 +7488,10 @@
                 <a:latin typeface="Times New Roman" pitchFamily="18" charset="0"/>
                 <a:cs typeface="B Titr" panose="00000700000000000000" pitchFamily="2" charset="-78"/>
               </a:rPr>
-              <a:t>Microprocessors and Assembly </a:t>
-            </a:r>
-            <a:r>
-              <a:rPr lang="en-US" sz="3200" dirty="0" smtClean="0">
-                <a:solidFill>
-                  <a:srgbClr val="C00000"/>
-                </a:solidFill>
-                <a:effectLst/>
-                <a:latin typeface="Times New Roman" pitchFamily="18" charset="0"/>
-                <a:cs typeface="B Titr" panose="00000700000000000000" pitchFamily="2" charset="-78"/>
-              </a:rPr>
-              <a:t>Language</a:t>
-            </a:r>
-            <a:r>
-              <a:rPr lang="en-US" sz="2400" dirty="0" smtClean="0">
-                <a:solidFill>
-                  <a:srgbClr val="C00000"/>
-                </a:solidFill>
-                <a:effectLst/>
-                <a:latin typeface="Times New Roman" pitchFamily="18" charset="0"/>
-                <a:cs typeface="B Titr" panose="00000700000000000000" pitchFamily="2" charset="-78"/>
-              </a:rPr>
-              <a:t/>
+              <a:t>Microprocessors and Assembly Language</a:t>
             </a:r>
             <a:br>
-              <a:rPr lang="en-US" sz="2400" dirty="0" smtClean="0">
+              <a:rPr lang="en-US" sz="2400" dirty="0">
                 <a:solidFill>
                   <a:srgbClr val="C00000"/>
                 </a:solidFill>
@@ -7703,7 +7501,7 @@
               </a:rPr>
             </a:br>
             <a:r>
-              <a:rPr lang="en-US" sz="2400" dirty="0" smtClean="0">
+              <a:rPr lang="en-US" sz="2400" dirty="0">
                 <a:solidFill>
                   <a:srgbClr val="C00000"/>
                 </a:solidFill>
@@ -7714,7 +7512,7 @@
               <a:t> </a:t>
             </a:r>
             <a:r>
-              <a:rPr lang="en-US" sz="2000" b="0" dirty="0" smtClean="0">
+              <a:rPr lang="en-US" sz="2000" b="0" dirty="0">
                 <a:solidFill>
                   <a:srgbClr val="130868"/>
                 </a:solidFill>
@@ -7946,7 +7744,7 @@
               </a:spcAft>
             </a:pPr>
             <a:r>
-              <a:rPr lang="en-US" sz="2400" b="1" dirty="0" smtClean="0">
+              <a:rPr lang="en-US" sz="2400" b="1" dirty="0">
                 <a:latin typeface="Calibri" panose="020F0502020204030204" pitchFamily="34" charset="0"/>
                 <a:cs typeface="B Titr" pitchFamily="2" charset="-78"/>
               </a:rPr>
@@ -7960,7 +7758,7 @@
               </a:spcAft>
             </a:pPr>
             <a:r>
-              <a:rPr lang="en-US" b="1" dirty="0" smtClean="0">
+              <a:rPr lang="en-US" b="1" dirty="0">
                 <a:latin typeface="Calibri" panose="020F0502020204030204" pitchFamily="34" charset="0"/>
                 <a:cs typeface="B Titr" pitchFamily="2" charset="-78"/>
               </a:rPr>
@@ -7982,14 +7780,7 @@
                 <a:latin typeface="Calibri" panose="020F0502020204030204" pitchFamily="34" charset="0"/>
                 <a:cs typeface="B Titr" pitchFamily="2" charset="-78"/>
               </a:rPr>
-              <a:t>Department of Computer </a:t>
-            </a:r>
-            <a:r>
-              <a:rPr lang="en-US" sz="2000" dirty="0" smtClean="0">
-                <a:latin typeface="Calibri" panose="020F0502020204030204" pitchFamily="34" charset="0"/>
-                <a:cs typeface="B Titr" pitchFamily="2" charset="-78"/>
-              </a:rPr>
-              <a:t>Engineering</a:t>
+              <a:t>Department of Computer Engineering</a:t>
             </a:r>
           </a:p>
           <a:p>
@@ -8003,14 +7794,7 @@
                 <a:latin typeface="Calibri" panose="020F0502020204030204" pitchFamily="34" charset="0"/>
                 <a:cs typeface="B Titr" pitchFamily="2" charset="-78"/>
               </a:rPr>
-              <a:t>Amirkabir University of </a:t>
-            </a:r>
-            <a:r>
-              <a:rPr lang="en-US" sz="2000" dirty="0" smtClean="0">
-                <a:latin typeface="Calibri" panose="020F0502020204030204" pitchFamily="34" charset="0"/>
-                <a:cs typeface="B Titr" pitchFamily="2" charset="-78"/>
-              </a:rPr>
-              <a:t>Technology</a:t>
+              <a:t>Amirkabir University of Technology</a:t>
             </a:r>
           </a:p>
           <a:p>
@@ -8020,16 +7804,12 @@
               </a:lnSpc>
             </a:pPr>
             <a:r>
-              <a:rPr lang="en-US" sz="2000" dirty="0" smtClean="0">
+              <a:rPr lang="en-US" sz="2000" dirty="0">
                 <a:latin typeface="Calibri" panose="020F0502020204030204" pitchFamily="34" charset="0"/>
                 <a:cs typeface="B Titr" pitchFamily="2" charset="-78"/>
               </a:rPr>
               <a:t>Lecture 11</a:t>
             </a:r>
-            <a:endParaRPr lang="en-US" sz="2000" dirty="0">
-              <a:latin typeface="Calibri" panose="020F0502020204030204" pitchFamily="34" charset="0"/>
-              <a:cs typeface="B Titr" pitchFamily="2" charset="-78"/>
-            </a:endParaRPr>
           </a:p>
         </p:txBody>
       </p:sp>
@@ -8043,21 +7823,6 @@
   <p:clrMapOvr>
     <a:masterClrMapping/>
   </p:clrMapOvr>
-  <mc:AlternateContent xmlns:mc="http://schemas.openxmlformats.org/markup-compatibility/2006" xmlns:p14="http://schemas.microsoft.com/office/powerpoint/2010/main">
-    <mc:Choice Requires="p14">
-      <p:transition spd="slow" p14:dur="2000"/>
-    </mc:Choice>
-    <mc:Fallback xmlns="">
-      <p:transition spd="slow"/>
-    </mc:Fallback>
-  </mc:AlternateContent>
-  <p:timing>
-    <p:tnLst>
-      <p:par>
-        <p:cTn id="1" dur="indefinite" restart="never" nodeType="tmRoot"/>
-      </p:par>
-    </p:tnLst>
-  </p:timing>
 </p:sld>
 </file>
 
@@ -8067,7 +7832,7 @@
     <p:bg>
       <p:bgPr>
         <a:blipFill dpi="0" rotWithShape="1">
-          <a:blip r:embed="rId6">
+          <a:blip r:embed="rId5">
             <a:lum/>
           </a:blip>
           <a:srcRect/>
@@ -8180,14 +7945,11 @@
           <a:p>
             <a:pPr algn="ctr" rtl="1"/>
             <a:r>
-              <a:rPr lang="en-US" sz="1400" dirty="0" smtClean="0">
+              <a:rPr lang="en-US" sz="1400" dirty="0">
                 <a:cs typeface="B Titr" panose="00000700000000000000" pitchFamily="2" charset="-78"/>
               </a:rPr>
               <a:t>Microprocessors and Assembly Language, Fall 2024, AUT, Tehran, Iran </a:t>
             </a:r>
-            <a:endParaRPr lang="en-US" sz="1400" dirty="0">
-              <a:cs typeface="B Titr" panose="00000700000000000000" pitchFamily="2" charset="-78"/>
-            </a:endParaRPr>
           </a:p>
         </p:txBody>
       </p:sp>
@@ -8218,21 +7980,13 @@
                 <a:spcPct val="150000"/>
               </a:lnSpc>
             </a:pPr>
-            <a:r>
-              <a:rPr lang="en-US" sz="2000" dirty="0"/>
-              <a:t/>
-            </a:r>
             <a:br>
               <a:rPr lang="en-US" sz="2000" dirty="0"/>
             </a:br>
-            <a:r>
-              <a:rPr lang="en-US" sz="2000" dirty="0"/>
-              <a:t/>
-            </a:r>
             <a:br>
               <a:rPr lang="en-US" sz="2000" dirty="0"/>
             </a:br>
-            <a:endParaRPr lang="en-US" sz="2000" b="1" dirty="0" smtClean="0">
+            <a:endParaRPr lang="en-US" sz="2000" b="1" dirty="0">
               <a:solidFill>
                 <a:srgbClr val="00B050"/>
               </a:solidFill>
@@ -8284,11 +8038,7 @@
             </a:pPr>
             <a:r>
               <a:rPr lang="en-US" sz="2000" b="1" dirty="0"/>
-              <a:t>Some fraction within the range of </a:t>
-            </a:r>
-            <a:r>
-              <a:rPr lang="en-US" sz="2000" b="1" dirty="0" smtClean="0"/>
-              <a:t>values</a:t>
+              <a:t>Some fraction within the range of values</a:t>
             </a:r>
           </a:p>
           <a:p>
@@ -8300,12 +8050,8 @@
               <a:buChar char="•"/>
             </a:pPr>
             <a:r>
-              <a:rPr lang="en-US" sz="2000" b="1" dirty="0" smtClean="0"/>
-              <a:t>What </a:t>
-            </a:r>
-            <a:r>
               <a:rPr lang="en-US" sz="2000" b="1" dirty="0"/>
-              <a:t>range to use?</a:t>
+              <a:t>What range to use?</a:t>
             </a:r>
           </a:p>
           <a:p>
@@ -8316,7 +8062,7 @@
               <a:buFont typeface="Arial" panose="020B0604020202020204" pitchFamily="34" charset="0"/>
               <a:buChar char="•"/>
             </a:pPr>
-            <a:endParaRPr lang="en-US" sz="2000" b="1" dirty="0" smtClean="0"/>
+            <a:endParaRPr lang="en-US" sz="2000" b="1" dirty="0"/>
           </a:p>
           <a:p>
             <a:pPr marL="342900" indent="-342900">
@@ -8326,7 +8072,7 @@
               <a:buFont typeface="Arial" panose="020B0604020202020204" pitchFamily="34" charset="0"/>
               <a:buChar char="•"/>
             </a:pPr>
-            <a:endParaRPr lang="en-US" b="1" dirty="0" smtClean="0"/>
+            <a:endParaRPr lang="en-US" b="1" dirty="0"/>
           </a:p>
         </p:txBody>
       </p:sp>
@@ -8390,12 +8136,12 @@
             <a:graphicData uri="http://schemas.openxmlformats.org/presentationml/2006/ole">
               <mc:AlternateContent xmlns:mc="http://schemas.openxmlformats.org/markup-compatibility/2006">
                 <mc:Choice xmlns:v="urn:schemas-microsoft-com:vml" Requires="v">
-                  <p:oleObj spid="_x0000_s2194" name="Equation" r:id="rId7" imgW="228501" imgH="215806" progId="Equation.3">
+                  <p:oleObj name="Equation" r:id="rId6" imgW="228501" imgH="215806" progId="Equation.3">
                     <p:embed/>
                   </p:oleObj>
                 </mc:Choice>
                 <mc:Fallback>
-                  <p:oleObj name="Equation" r:id="rId7" imgW="228501" imgH="215806" progId="Equation.3">
+                  <p:oleObj name="Equation" r:id="rId6" imgW="228501" imgH="215806" progId="Equation.3">
                     <p:embed/>
                     <p:pic>
                       <p:nvPicPr>
@@ -8406,7 +8152,7 @@
                         <p:nvPr/>
                       </p:nvPicPr>
                       <p:blipFill>
-                        <a:blip r:embed="rId8">
+                        <a:blip r:embed="rId7">
                           <a:extLst>
                             <a:ext uri="{28A0092B-C50C-407E-A947-70E740481C1C}">
                               <a14:useLocalDpi xmlns:a14="http://schemas.microsoft.com/office/drawing/2010/main" val="0"/>
@@ -8565,12 +8311,12 @@
             <a:graphicData uri="http://schemas.openxmlformats.org/presentationml/2006/ole">
               <mc:AlternateContent xmlns:mc="http://schemas.openxmlformats.org/markup-compatibility/2006">
                 <mc:Choice xmlns:v="urn:schemas-microsoft-com:vml" Requires="v">
-                  <p:oleObj spid="_x0000_s2195" name="Equation" r:id="rId9" imgW="88746" imgH="152136" progId="Equation.3">
+                  <p:oleObj name="Equation" r:id="rId8" imgW="88746" imgH="152136" progId="Equation.3">
                     <p:embed/>
                   </p:oleObj>
                 </mc:Choice>
                 <mc:Fallback>
-                  <p:oleObj name="Equation" r:id="rId9" imgW="88746" imgH="152136" progId="Equation.3">
+                  <p:oleObj name="Equation" r:id="rId8" imgW="88746" imgH="152136" progId="Equation.3">
                     <p:embed/>
                     <p:pic>
                       <p:nvPicPr>
@@ -8581,7 +8327,7 @@
                         <p:nvPr/>
                       </p:nvPicPr>
                       <p:blipFill>
-                        <a:blip r:embed="rId10">
+                        <a:blip r:embed="rId9">
                           <a:extLst>
                             <a:ext uri="{28A0092B-C50C-407E-A947-70E740481C1C}">
                               <a14:useLocalDpi xmlns:a14="http://schemas.microsoft.com/office/drawing/2010/main" val="0"/>
@@ -8938,12 +8684,12 @@
             <a:graphicData uri="http://schemas.openxmlformats.org/presentationml/2006/ole">
               <mc:AlternateContent xmlns:mc="http://schemas.openxmlformats.org/markup-compatibility/2006">
                 <mc:Choice xmlns:v="urn:schemas-microsoft-com:vml" Requires="v">
-                  <p:oleObj spid="_x0000_s2196" name="Equation" r:id="rId11" imgW="215619" imgH="215619" progId="Equation.3">
+                  <p:oleObj name="Equation" r:id="rId10" imgW="215619" imgH="215619" progId="Equation.3">
                     <p:embed/>
                   </p:oleObj>
                 </mc:Choice>
                 <mc:Fallback>
-                  <p:oleObj name="Equation" r:id="rId11" imgW="215619" imgH="215619" progId="Equation.3">
+                  <p:oleObj name="Equation" r:id="rId10" imgW="215619" imgH="215619" progId="Equation.3">
                     <p:embed/>
                     <p:pic>
                       <p:nvPicPr>
@@ -8954,7 +8700,7 @@
                         <p:nvPr/>
                       </p:nvPicPr>
                       <p:blipFill>
-                        <a:blip r:embed="rId12">
+                        <a:blip r:embed="rId11">
                           <a:extLst>
                             <a:ext uri="{28A0092B-C50C-407E-A947-70E740481C1C}">
                               <a14:useLocalDpi xmlns:a14="http://schemas.microsoft.com/office/drawing/2010/main" val="0"/>
@@ -9251,12 +8997,12 @@
             <a:graphicData uri="http://schemas.openxmlformats.org/presentationml/2006/ole">
               <mc:AlternateContent xmlns:mc="http://schemas.openxmlformats.org/markup-compatibility/2006">
                 <mc:Choice xmlns:v="urn:schemas-microsoft-com:vml" Requires="v">
-                  <p:oleObj spid="_x0000_s2197" name="Equation" r:id="rId13" imgW="88746" imgH="152136" progId="Equation.3">
+                  <p:oleObj name="Equation" r:id="rId12" imgW="88746" imgH="152136" progId="Equation.3">
                     <p:embed/>
                   </p:oleObj>
                 </mc:Choice>
                 <mc:Fallback>
-                  <p:oleObj name="Equation" r:id="rId13" imgW="88746" imgH="152136" progId="Equation.3">
+                  <p:oleObj name="Equation" r:id="rId12" imgW="88746" imgH="152136" progId="Equation.3">
                     <p:embed/>
                     <p:pic>
                       <p:nvPicPr>
@@ -9267,7 +9013,7 @@
                         <p:nvPr/>
                       </p:nvPicPr>
                       <p:blipFill>
-                        <a:blip r:embed="rId10">
+                        <a:blip r:embed="rId9">
                           <a:extLst>
                             <a:ext uri="{28A0092B-C50C-407E-A947-70E740481C1C}">
                               <a14:useLocalDpi xmlns:a14="http://schemas.microsoft.com/office/drawing/2010/main" val="0"/>
@@ -9587,12 +9333,12 @@
             <a:graphicData uri="http://schemas.openxmlformats.org/presentationml/2006/ole">
               <mc:AlternateContent xmlns:mc="http://schemas.openxmlformats.org/markup-compatibility/2006">
                 <mc:Choice xmlns:v="urn:schemas-microsoft-com:vml" Requires="v">
-                  <p:oleObj spid="_x0000_s2198" name="Equation" r:id="rId14" imgW="228501" imgH="215806" progId="Equation.3">
+                  <p:oleObj name="Equation" r:id="rId13" imgW="228501" imgH="215806" progId="Equation.3">
                     <p:embed/>
                   </p:oleObj>
                 </mc:Choice>
                 <mc:Fallback>
-                  <p:oleObj name="Equation" r:id="rId14" imgW="228501" imgH="215806" progId="Equation.3">
+                  <p:oleObj name="Equation" r:id="rId13" imgW="228501" imgH="215806" progId="Equation.3">
                     <p:embed/>
                     <p:pic>
                       <p:nvPicPr>
@@ -9603,7 +9349,7 @@
                         <p:nvPr/>
                       </p:nvPicPr>
                       <p:blipFill>
-                        <a:blip r:embed="rId8">
+                        <a:blip r:embed="rId7">
                           <a:extLst>
                             <a:ext uri="{28A0092B-C50C-407E-A947-70E740481C1C}">
                               <a14:useLocalDpi xmlns:a14="http://schemas.microsoft.com/office/drawing/2010/main" val="0"/>
@@ -9680,12 +9426,12 @@
             <a:graphicData uri="http://schemas.openxmlformats.org/presentationml/2006/ole">
               <mc:AlternateContent xmlns:mc="http://schemas.openxmlformats.org/markup-compatibility/2006">
                 <mc:Choice xmlns:v="urn:schemas-microsoft-com:vml" Requires="v">
-                  <p:oleObj spid="_x0000_s2199" name="Equation" r:id="rId15" imgW="215619" imgH="215619" progId="Equation.3">
+                  <p:oleObj name="Equation" r:id="rId14" imgW="215619" imgH="215619" progId="Equation.3">
                     <p:embed/>
                   </p:oleObj>
                 </mc:Choice>
                 <mc:Fallback>
-                  <p:oleObj name="Equation" r:id="rId15" imgW="215619" imgH="215619" progId="Equation.3">
+                  <p:oleObj name="Equation" r:id="rId14" imgW="215619" imgH="215619" progId="Equation.3">
                     <p:embed/>
                     <p:pic>
                       <p:nvPicPr>
@@ -9696,7 +9442,7 @@
                         <p:nvPr/>
                       </p:nvPicPr>
                       <p:blipFill>
-                        <a:blip r:embed="rId12">
+                        <a:blip r:embed="rId11">
                           <a:extLst>
                             <a:ext uri="{28A0092B-C50C-407E-A947-70E740481C1C}">
                               <a14:useLocalDpi xmlns:a14="http://schemas.microsoft.com/office/drawing/2010/main" val="0"/>
@@ -9993,12 +9739,12 @@
             <a:graphicData uri="http://schemas.openxmlformats.org/presentationml/2006/ole">
               <mc:AlternateContent xmlns:mc="http://schemas.openxmlformats.org/markup-compatibility/2006">
                 <mc:Choice xmlns:v="urn:schemas-microsoft-com:vml" Requires="v">
-                  <p:oleObj spid="_x0000_s2200" name="Equation" r:id="rId16" imgW="88746" imgH="152136" progId="Equation.3">
+                  <p:oleObj name="Equation" r:id="rId15" imgW="88746" imgH="152136" progId="Equation.3">
                     <p:embed/>
                   </p:oleObj>
                 </mc:Choice>
                 <mc:Fallback>
-                  <p:oleObj name="Equation" r:id="rId16" imgW="88746" imgH="152136" progId="Equation.3">
+                  <p:oleObj name="Equation" r:id="rId15" imgW="88746" imgH="152136" progId="Equation.3">
                     <p:embed/>
                     <p:pic>
                       <p:nvPicPr>
@@ -10009,7 +9755,7 @@
                         <p:nvPr/>
                       </p:nvPicPr>
                       <p:blipFill>
-                        <a:blip r:embed="rId10">
+                        <a:blip r:embed="rId9">
                           <a:extLst>
                             <a:ext uri="{28A0092B-C50C-407E-A947-70E740481C1C}">
                               <a14:useLocalDpi xmlns:a14="http://schemas.microsoft.com/office/drawing/2010/main" val="0"/>
@@ -10329,12 +10075,12 @@
             <a:graphicData uri="http://schemas.openxmlformats.org/presentationml/2006/ole">
               <mc:AlternateContent xmlns:mc="http://schemas.openxmlformats.org/markup-compatibility/2006">
                 <mc:Choice xmlns:v="urn:schemas-microsoft-com:vml" Requires="v">
-                  <p:oleObj spid="_x0000_s2201" name="Equation" r:id="rId17" imgW="228501" imgH="215806" progId="Equation.3">
+                  <p:oleObj name="Equation" r:id="rId16" imgW="228501" imgH="215806" progId="Equation.3">
                     <p:embed/>
                   </p:oleObj>
                 </mc:Choice>
                 <mc:Fallback>
-                  <p:oleObj name="Equation" r:id="rId17" imgW="228501" imgH="215806" progId="Equation.3">
+                  <p:oleObj name="Equation" r:id="rId16" imgW="228501" imgH="215806" progId="Equation.3">
                     <p:embed/>
                     <p:pic>
                       <p:nvPicPr>
@@ -10345,7 +10091,7 @@
                         <p:nvPr/>
                       </p:nvPicPr>
                       <p:blipFill>
-                        <a:blip r:embed="rId8">
+                        <a:blip r:embed="rId7">
                           <a:extLst>
                             <a:ext uri="{28A0092B-C50C-407E-A947-70E740481C1C}">
                               <a14:useLocalDpi xmlns:a14="http://schemas.microsoft.com/office/drawing/2010/main" val="0"/>
@@ -10422,12 +10168,12 @@
             <a:graphicData uri="http://schemas.openxmlformats.org/presentationml/2006/ole">
               <mc:AlternateContent xmlns:mc="http://schemas.openxmlformats.org/markup-compatibility/2006">
                 <mc:Choice xmlns:v="urn:schemas-microsoft-com:vml" Requires="v">
-                  <p:oleObj spid="_x0000_s2202" name="Equation" r:id="rId18" imgW="215619" imgH="215619" progId="Equation.3">
+                  <p:oleObj name="Equation" r:id="rId17" imgW="215619" imgH="215619" progId="Equation.3">
                     <p:embed/>
                   </p:oleObj>
                 </mc:Choice>
                 <mc:Fallback>
-                  <p:oleObj name="Equation" r:id="rId18" imgW="215619" imgH="215619" progId="Equation.3">
+                  <p:oleObj name="Equation" r:id="rId17" imgW="215619" imgH="215619" progId="Equation.3">
                     <p:embed/>
                     <p:pic>
                       <p:nvPicPr>
@@ -10438,7 +10184,7 @@
                         <p:nvPr/>
                       </p:nvPicPr>
                       <p:blipFill>
-                        <a:blip r:embed="rId12">
+                        <a:blip r:embed="rId11">
                           <a:extLst>
                             <a:ext uri="{28A0092B-C50C-407E-A947-70E740481C1C}">
                               <a14:useLocalDpi xmlns:a14="http://schemas.microsoft.com/office/drawing/2010/main" val="0"/>
@@ -10623,7 +10369,7 @@
       </p:sp>
     </p:spTree>
     <p:custDataLst>
-      <p:tags r:id="rId3"/>
+      <p:tags r:id="rId2"/>
     </p:custDataLst>
     <p:extLst>
       <p:ext uri="{BB962C8B-B14F-4D97-AF65-F5344CB8AC3E}">
@@ -10634,14 +10380,6 @@
   <p:clrMapOvr>
     <a:overrideClrMapping bg1="lt1" tx1="dk1" bg2="lt2" tx2="dk2" accent1="accent1" accent2="accent2" accent3="accent3" accent4="accent4" accent5="accent5" accent6="accent6" hlink="hlink" folHlink="folHlink"/>
   </p:clrMapOvr>
-  <mc:AlternateContent xmlns:mc="http://schemas.openxmlformats.org/markup-compatibility/2006" xmlns:p14="http://schemas.microsoft.com/office/powerpoint/2010/main">
-    <mc:Choice Requires="p14">
-      <p:transition spd="slow" p14:dur="2000"/>
-    </mc:Choice>
-    <mc:Fallback xmlns="">
-      <p:transition spd="slow"/>
-    </mc:Fallback>
-  </mc:AlternateContent>
   <p:timing>
     <p:tnLst>
       <p:par>
@@ -10994,14 +10732,11 @@
           <a:p>
             <a:pPr algn="ctr" rtl="1"/>
             <a:r>
-              <a:rPr lang="en-US" sz="1400" dirty="0" smtClean="0">
+              <a:rPr lang="en-US" sz="1400" dirty="0">
                 <a:cs typeface="B Titr" panose="00000700000000000000" pitchFamily="2" charset="-78"/>
               </a:rPr>
               <a:t>Microprocessors and Assembly Language, Fall 2024, AUT, Tehran, Iran </a:t>
             </a:r>
-            <a:endParaRPr lang="en-US" sz="1400" dirty="0">
-              <a:cs typeface="B Titr" panose="00000700000000000000" pitchFamily="2" charset="-78"/>
-            </a:endParaRPr>
           </a:p>
         </p:txBody>
       </p:sp>
@@ -11032,21 +10767,13 @@
                 <a:spcPct val="150000"/>
               </a:lnSpc>
             </a:pPr>
-            <a:r>
-              <a:rPr lang="en-US" sz="2000" dirty="0"/>
-              <a:t/>
-            </a:r>
             <a:br>
               <a:rPr lang="en-US" sz="2000" dirty="0"/>
             </a:br>
-            <a:r>
-              <a:rPr lang="en-US" sz="2000" dirty="0"/>
-              <a:t/>
-            </a:r>
             <a:br>
               <a:rPr lang="en-US" sz="2000" dirty="0"/>
             </a:br>
-            <a:endParaRPr lang="en-US" sz="2000" b="1" dirty="0" smtClean="0">
+            <a:endParaRPr lang="en-US" sz="2000" b="1" dirty="0">
               <a:solidFill>
                 <a:srgbClr val="00B050"/>
               </a:solidFill>
@@ -11110,12 +10837,8 @@
               <a:buChar char="•"/>
             </a:pPr>
             <a:r>
-              <a:rPr lang="en-US" sz="2000" b="1" dirty="0" smtClean="0"/>
-              <a:t>12-bit </a:t>
-            </a:r>
-            <a:r>
               <a:rPr lang="en-US" sz="2000" b="1" dirty="0"/>
-              <a:t>ADC</a:t>
+              <a:t>12-bit ADC</a:t>
             </a:r>
           </a:p>
           <a:p>
@@ -11151,23 +10874,15 @@
               </a:lnSpc>
             </a:pPr>
             <a:r>
-              <a:rPr lang="en-US" sz="2000" b="1" dirty="0" smtClean="0">
-                <a:solidFill>
-                  <a:srgbClr val="FF0000"/>
-                </a:solidFill>
-              </a:rPr>
-              <a:t>	Larger </a:t>
-            </a:r>
-            <a:r>
               <a:rPr lang="en-US" sz="2000" b="1" dirty="0">
                 <a:solidFill>
                   <a:srgbClr val="FF0000"/>
                 </a:solidFill>
               </a:rPr>
-              <a:t>range </a:t>
-            </a:r>
-            <a:r>
-              <a:rPr lang="en-US" sz="2000" b="1" dirty="0" smtClean="0">
+              <a:t>	Larger range </a:t>
+            </a:r>
+            <a:r>
+              <a:rPr lang="en-US" sz="2000" b="1" dirty="0">
                 <a:solidFill>
                   <a:srgbClr val="FF0000"/>
                 </a:solidFill>
@@ -11176,20 +10891,12 @@
               <a:t></a:t>
             </a:r>
             <a:r>
-              <a:rPr lang="en-US" sz="2000" b="1" dirty="0" smtClean="0">
-                <a:solidFill>
-                  <a:srgbClr val="FF0000"/>
-                </a:solidFill>
-              </a:rPr>
-              <a:t>  </a:t>
-            </a:r>
-            <a:r>
               <a:rPr lang="en-US" sz="2000" b="1" dirty="0">
                 <a:solidFill>
                   <a:srgbClr val="FF0000"/>
                 </a:solidFill>
               </a:rPr>
-              <a:t>less information</a:t>
+              <a:t>  less information</a:t>
             </a:r>
           </a:p>
           <a:p>
@@ -11201,12 +10908,8 @@
               <a:buChar char="•"/>
             </a:pPr>
             <a:r>
-              <a:rPr lang="en-US" sz="2000" b="1" dirty="0" smtClean="0"/>
-              <a:t>Quantization </a:t>
-            </a:r>
-            <a:r>
               <a:rPr lang="en-US" sz="2000" b="1" dirty="0"/>
-              <a:t>Error</a:t>
+              <a:t>Quantization Error</a:t>
             </a:r>
           </a:p>
           <a:p>
@@ -11219,11 +10922,7 @@
             </a:pPr>
             <a:r>
               <a:rPr lang="en-US" sz="2000" b="1" dirty="0"/>
-              <a:t>How far off discrete value is </a:t>
-            </a:r>
-            <a:r>
-              <a:rPr lang="en-US" sz="2000" b="1" dirty="0" smtClean="0"/>
-              <a:t>	</a:t>
+              <a:t>How far off discrete value is 	</a:t>
             </a:r>
           </a:p>
           <a:p>
@@ -11234,15 +10933,7 @@
             </a:pPr>
             <a:r>
               <a:rPr lang="en-US" sz="2000" b="1" dirty="0"/>
-              <a:t>	</a:t>
-            </a:r>
-            <a:r>
-              <a:rPr lang="en-US" sz="2000" b="1" dirty="0" smtClean="0"/>
-              <a:t>from </a:t>
-            </a:r>
-            <a:r>
-              <a:rPr lang="en-US" sz="2000" b="1" dirty="0"/>
-              <a:t>actual</a:t>
+              <a:t>	from actual</a:t>
             </a:r>
           </a:p>
           <a:p>
@@ -11264,12 +10955,8 @@
               <a:t></a:t>
             </a:r>
             <a:r>
-              <a:rPr lang="en-US" sz="2000" b="1" dirty="0" smtClean="0"/>
-              <a:t> </a:t>
-            </a:r>
-            <a:r>
               <a:rPr lang="en-US" sz="2000" b="1" dirty="0"/>
-              <a:t>Range / 8192</a:t>
+              <a:t> Range / 8192</a:t>
             </a:r>
           </a:p>
           <a:p>
@@ -11279,20 +10966,12 @@
               </a:lnSpc>
             </a:pPr>
             <a:r>
-              <a:rPr lang="en-US" sz="2000" b="1" dirty="0" smtClean="0">
-                <a:solidFill>
-                  <a:srgbClr val="FF0000"/>
-                </a:solidFill>
-              </a:rPr>
-              <a:t>	Larger </a:t>
-            </a:r>
-            <a:r>
               <a:rPr lang="en-US" sz="2000" b="1" dirty="0">
                 <a:solidFill>
                   <a:srgbClr val="FF0000"/>
                 </a:solidFill>
               </a:rPr>
-              <a:t>range </a:t>
+              <a:t>	Larger range </a:t>
             </a:r>
             <a:r>
               <a:rPr lang="en-US" sz="2000" b="1" dirty="0">
@@ -11304,20 +10983,12 @@
               <a:t></a:t>
             </a:r>
             <a:r>
-              <a:rPr lang="en-US" sz="2000" b="1" dirty="0" smtClean="0">
-                <a:solidFill>
-                  <a:srgbClr val="FF0000"/>
-                </a:solidFill>
-              </a:rPr>
-              <a:t> </a:t>
-            </a:r>
-            <a:r>
               <a:rPr lang="en-US" sz="2000" b="1" dirty="0">
                 <a:solidFill>
                   <a:srgbClr val="FF0000"/>
                 </a:solidFill>
               </a:rPr>
-              <a:t>larger error</a:t>
+              <a:t> larger error</a:t>
             </a:r>
           </a:p>
           <a:p>
@@ -11328,7 +10999,7 @@
               <a:buFont typeface="Arial" panose="020B0604020202020204" pitchFamily="34" charset="0"/>
               <a:buChar char="•"/>
             </a:pPr>
-            <a:endParaRPr lang="en-US" sz="2000" b="1" dirty="0" smtClean="0"/>
+            <a:endParaRPr lang="en-US" sz="2000" b="1" dirty="0"/>
           </a:p>
           <a:p>
             <a:pPr marL="342900" indent="-342900">
@@ -11338,7 +11009,7 @@
               <a:buFont typeface="Arial" panose="020B0604020202020204" pitchFamily="34" charset="0"/>
               <a:buChar char="•"/>
             </a:pPr>
-            <a:endParaRPr lang="en-US" b="1" dirty="0" smtClean="0"/>
+            <a:endParaRPr lang="en-US" b="1" dirty="0"/>
           </a:p>
         </p:txBody>
       </p:sp>
@@ -11378,7 +11049,7 @@
           </p:cNvPicPr>
           <p:nvPr/>
         </p:nvPicPr>
-        <p:blipFill>
+        <p:blipFill rotWithShape="1">
           <a:blip r:embed="rId4">
             <a:extLst>
               <a:ext uri="{28A0092B-C50C-407E-A947-70E740481C1C}">
@@ -11386,15 +11057,13 @@
               </a:ext>
             </a:extLst>
           </a:blip>
-          <a:srcRect/>
-          <a:stretch>
-            <a:fillRect/>
-          </a:stretch>
+          <a:srcRect r="9990"/>
+          <a:stretch/>
         </p:blipFill>
         <p:spPr bwMode="auto">
           <a:xfrm>
             <a:off x="5330242" y="2060351"/>
-            <a:ext cx="3813758" cy="4161989"/>
+            <a:ext cx="3432758" cy="4161989"/>
           </a:xfrm>
           <a:prstGeom prst="rect">
             <a:avLst/>
@@ -11434,21 +11103,6 @@
   <p:clrMapOvr>
     <a:overrideClrMapping bg1="lt1" tx1="dk1" bg2="lt2" tx2="dk2" accent1="accent1" accent2="accent2" accent3="accent3" accent4="accent4" accent5="accent5" accent6="accent6" hlink="hlink" folHlink="folHlink"/>
   </p:clrMapOvr>
-  <mc:AlternateContent xmlns:mc="http://schemas.openxmlformats.org/markup-compatibility/2006" xmlns:p14="http://schemas.microsoft.com/office/powerpoint/2010/main">
-    <mc:Choice Requires="p14">
-      <p:transition spd="slow" p14:dur="2000"/>
-    </mc:Choice>
-    <mc:Fallback xmlns="">
-      <p:transition spd="slow"/>
-    </mc:Fallback>
-  </mc:AlternateContent>
-  <p:timing>
-    <p:tnLst>
-      <p:par>
-        <p:cTn id="1" dur="indefinite" restart="never" nodeType="tmRoot"/>
-      </p:par>
-    </p:tnLst>
-  </p:timing>
 </p:sld>
 </file>
 
@@ -11458,7 +11112,7 @@
     <p:bg>
       <p:bgPr>
         <a:blipFill dpi="0" rotWithShape="1">
-          <a:blip r:embed="rId5">
+          <a:blip r:embed="rId4">
             <a:lum/>
           </a:blip>
           <a:srcRect/>
@@ -11571,14 +11225,11 @@
           <a:p>
             <a:pPr algn="ctr" rtl="1"/>
             <a:r>
-              <a:rPr lang="en-US" sz="1400" dirty="0" smtClean="0">
+              <a:rPr lang="en-US" sz="1400" dirty="0">
                 <a:cs typeface="B Titr" panose="00000700000000000000" pitchFamily="2" charset="-78"/>
               </a:rPr>
               <a:t>Microprocessors and Assembly Language, Fall 2024, AUT, Tehran, Iran </a:t>
             </a:r>
-            <a:endParaRPr lang="en-US" sz="1400" dirty="0">
-              <a:cs typeface="B Titr" panose="00000700000000000000" pitchFamily="2" charset="-78"/>
-            </a:endParaRPr>
           </a:p>
         </p:txBody>
       </p:sp>
@@ -11609,21 +11260,13 @@
                 <a:spcPct val="150000"/>
               </a:lnSpc>
             </a:pPr>
-            <a:r>
-              <a:rPr lang="en-US" sz="2000" dirty="0"/>
-              <a:t/>
-            </a:r>
             <a:br>
               <a:rPr lang="en-US" sz="2000" dirty="0"/>
             </a:br>
-            <a:r>
-              <a:rPr lang="en-US" sz="2000" dirty="0"/>
-              <a:t/>
-            </a:r>
             <a:br>
               <a:rPr lang="en-US" sz="2000" dirty="0"/>
             </a:br>
-            <a:endParaRPr lang="en-US" sz="2000" b="1" dirty="0" smtClean="0">
+            <a:endParaRPr lang="en-US" sz="2000" b="1" dirty="0">
               <a:solidFill>
                 <a:srgbClr val="00B050"/>
               </a:solidFill>
@@ -11918,12 +11561,12 @@
           <a:graphicData uri="http://schemas.openxmlformats.org/presentationml/2006/ole">
             <mc:AlternateContent xmlns:mc="http://schemas.openxmlformats.org/markup-compatibility/2006">
               <mc:Choice xmlns:v="urn:schemas-microsoft-com:vml" Requires="v">
-                <p:oleObj spid="_x0000_s3125" name="Equation" r:id="rId6" imgW="634725" imgH="241195" progId="Equation.3">
+                <p:oleObj name="Equation" r:id="rId5" imgW="634725" imgH="241195" progId="Equation.3">
                   <p:embed/>
                 </p:oleObj>
               </mc:Choice>
               <mc:Fallback>
-                <p:oleObj name="Equation" r:id="rId6" imgW="634725" imgH="241195" progId="Equation.3">
+                <p:oleObj name="Equation" r:id="rId5" imgW="634725" imgH="241195" progId="Equation.3">
                   <p:embed/>
                   <p:pic>
                     <p:nvPicPr>
@@ -11934,7 +11577,7 @@
                       <p:nvPr/>
                     </p:nvPicPr>
                     <p:blipFill>
-                      <a:blip r:embed="rId7">
+                      <a:blip r:embed="rId6">
                         <a:extLst>
                           <a:ext uri="{28A0092B-C50C-407E-A947-70E740481C1C}">
                             <a14:useLocalDpi xmlns:a14="http://schemas.microsoft.com/office/drawing/2010/main" val="0"/>
@@ -12230,12 +11873,12 @@
             <a:graphicData uri="http://schemas.openxmlformats.org/presentationml/2006/ole">
               <mc:AlternateContent xmlns:mc="http://schemas.openxmlformats.org/markup-compatibility/2006">
                 <mc:Choice xmlns:v="urn:schemas-microsoft-com:vml" Requires="v">
-                  <p:oleObj spid="_x0000_s3126" name="Equation" r:id="rId8" imgW="342751" imgH="203112" progId="Equation.3">
+                  <p:oleObj name="Equation" r:id="rId7" imgW="342751" imgH="203112" progId="Equation.3">
                     <p:embed/>
                   </p:oleObj>
                 </mc:Choice>
                 <mc:Fallback>
-                  <p:oleObj name="Equation" r:id="rId8" imgW="342751" imgH="203112" progId="Equation.3">
+                  <p:oleObj name="Equation" r:id="rId7" imgW="342751" imgH="203112" progId="Equation.3">
                     <p:embed/>
                     <p:pic>
                       <p:nvPicPr>
@@ -12246,7 +11889,7 @@
                         <p:nvPr/>
                       </p:nvPicPr>
                       <p:blipFill>
-                        <a:blip r:embed="rId9">
+                        <a:blip r:embed="rId8">
                           <a:extLst>
                             <a:ext uri="{28A0092B-C50C-407E-A947-70E740481C1C}">
                               <a14:useLocalDpi xmlns:a14="http://schemas.microsoft.com/office/drawing/2010/main" val="0"/>
@@ -12323,12 +11966,12 @@
             <a:graphicData uri="http://schemas.openxmlformats.org/presentationml/2006/ole">
               <mc:AlternateContent xmlns:mc="http://schemas.openxmlformats.org/markup-compatibility/2006">
                 <mc:Choice xmlns:v="urn:schemas-microsoft-com:vml" Requires="v">
-                  <p:oleObj spid="_x0000_s3127" name="Equation" r:id="rId10" imgW="88746" imgH="152136" progId="Equation.3">
+                  <p:oleObj name="Equation" r:id="rId9" imgW="88746" imgH="152136" progId="Equation.3">
                     <p:embed/>
                   </p:oleObj>
                 </mc:Choice>
                 <mc:Fallback>
-                  <p:oleObj name="Equation" r:id="rId10" imgW="88746" imgH="152136" progId="Equation.3">
+                  <p:oleObj name="Equation" r:id="rId9" imgW="88746" imgH="152136" progId="Equation.3">
                     <p:embed/>
                     <p:pic>
                       <p:nvPicPr>
@@ -12339,7 +11982,7 @@
                         <p:nvPr/>
                       </p:nvPicPr>
                       <p:blipFill>
-                        <a:blip r:embed="rId11">
+                        <a:blip r:embed="rId10">
                           <a:extLst>
                             <a:ext uri="{28A0092B-C50C-407E-A947-70E740481C1C}">
                               <a14:useLocalDpi xmlns:a14="http://schemas.microsoft.com/office/drawing/2010/main" val="0"/>
@@ -12526,7 +12169,7 @@
       </p:sp>
     </p:spTree>
     <p:custDataLst>
-      <p:tags r:id="rId3"/>
+      <p:tags r:id="rId2"/>
     </p:custDataLst>
     <p:extLst>
       <p:ext uri="{BB962C8B-B14F-4D97-AF65-F5344CB8AC3E}">
@@ -12537,14 +12180,6 @@
   <p:clrMapOvr>
     <a:overrideClrMapping bg1="lt1" tx1="dk1" bg2="lt2" tx2="dk2" accent1="accent1" accent2="accent2" accent3="accent3" accent4="accent4" accent5="accent5" accent6="accent6" hlink="hlink" folHlink="folHlink"/>
   </p:clrMapOvr>
-  <mc:AlternateContent xmlns:mc="http://schemas.openxmlformats.org/markup-compatibility/2006" xmlns:p14="http://schemas.microsoft.com/office/powerpoint/2010/main">
-    <mc:Choice Requires="p14">
-      <p:transition spd="slow" p14:dur="2000"/>
-    </mc:Choice>
-    <mc:Fallback xmlns="">
-      <p:transition spd="slow"/>
-    </mc:Fallback>
-  </mc:AlternateContent>
   <p:timing>
     <p:tnLst>
       <p:par>
@@ -12645,7 +12280,7 @@
     <p:bg>
       <p:bgPr>
         <a:blipFill dpi="0" rotWithShape="1">
-          <a:blip r:embed="rId5">
+          <a:blip r:embed="rId4">
             <a:lum/>
           </a:blip>
           <a:srcRect/>
@@ -12688,16 +12323,12 @@
           <a:lstStyle/>
           <a:p>
             <a:r>
-              <a:rPr lang="en-US" sz="3200" dirty="0" smtClean="0">
+              <a:rPr lang="en-US" sz="3200" dirty="0">
                 <a:latin typeface="+mj-lt"/>
                 <a:cs typeface="B Titr" panose="00000700000000000000" pitchFamily="2" charset="-78"/>
               </a:rPr>
               <a:t>Conversion: ADC</a:t>
             </a:r>
-            <a:endParaRPr lang="en-US" sz="3200" dirty="0">
-              <a:latin typeface="+mj-lt"/>
-              <a:cs typeface="B Titr" panose="00000700000000000000" pitchFamily="2" charset="-78"/>
-            </a:endParaRPr>
           </a:p>
         </p:txBody>
       </p:sp>
@@ -12758,14 +12389,11 @@
           <a:p>
             <a:pPr algn="ctr" rtl="1"/>
             <a:r>
-              <a:rPr lang="en-US" sz="1400" dirty="0" smtClean="0">
+              <a:rPr lang="en-US" sz="1400" dirty="0">
                 <a:cs typeface="B Titr" panose="00000700000000000000" pitchFamily="2" charset="-78"/>
               </a:rPr>
               <a:t>Microprocessors and Assembly Language, Fall 2024, AUT, Tehran, Iran </a:t>
             </a:r>
-            <a:endParaRPr lang="en-US" sz="1400" dirty="0">
-              <a:cs typeface="B Titr" panose="00000700000000000000" pitchFamily="2" charset="-78"/>
-            </a:endParaRPr>
           </a:p>
         </p:txBody>
       </p:sp>
@@ -12796,21 +12424,13 @@
                 <a:spcPct val="150000"/>
               </a:lnSpc>
             </a:pPr>
-            <a:r>
-              <a:rPr lang="en-US" sz="2000" dirty="0"/>
-              <a:t/>
-            </a:r>
             <a:br>
               <a:rPr lang="en-US" sz="2000" dirty="0"/>
             </a:br>
-            <a:r>
-              <a:rPr lang="en-US" sz="2000" dirty="0"/>
-              <a:t/>
-            </a:r>
             <a:br>
               <a:rPr lang="en-US" sz="2000" dirty="0"/>
             </a:br>
-            <a:endParaRPr lang="en-US" sz="2000" b="1" dirty="0" smtClean="0">
+            <a:endParaRPr lang="en-US" sz="2000" b="1" dirty="0">
               <a:solidFill>
                 <a:srgbClr val="00B050"/>
               </a:solidFill>
@@ -12849,19 +12469,7 @@
             </a:pPr>
             <a:r>
               <a:rPr lang="en-US" sz="2000" b="1" dirty="0"/>
-              <a:t>Converting between voltages, </a:t>
-            </a:r>
-            <a:r>
-              <a:rPr lang="en-US" sz="2000" b="1" dirty="0" smtClean="0"/>
-              <a:t>ADC </a:t>
-            </a:r>
-            <a:r>
-              <a:rPr lang="en-US" sz="2000" b="1" dirty="0"/>
-              <a:t>counts, and engineering </a:t>
-            </a:r>
-            <a:r>
-              <a:rPr lang="en-US" sz="2000" b="1" dirty="0" smtClean="0"/>
-              <a:t>units</a:t>
+              <a:t>Converting between voltages, ADC counts, and engineering units</a:t>
             </a:r>
           </a:p>
           <a:p>
@@ -12877,13 +12485,13 @@
               <a:t>Converting: ADC counts </a:t>
             </a:r>
             <a:r>
-              <a:rPr lang="en-US" sz="2000" b="1" dirty="0" smtClean="0">
+              <a:rPr lang="en-US" sz="2000" b="1" dirty="0">
                 <a:sym typeface="Wingdings" pitchFamily="2" charset="2"/>
               </a:rPr>
               <a:t></a:t>
             </a:r>
             <a:r>
-              <a:rPr lang="en-US" sz="2000" b="1" dirty="0" smtClean="0"/>
+              <a:rPr lang="en-US" sz="2000" b="1" dirty="0"/>
               <a:t> Voltage</a:t>
             </a:r>
           </a:p>
@@ -12905,7 +12513,7 @@
               <a:buFont typeface="Arial" panose="020B0604020202020204" pitchFamily="34" charset="0"/>
               <a:buChar char="•"/>
             </a:pPr>
-            <a:endParaRPr lang="en-US" sz="2000" b="1" dirty="0" smtClean="0"/>
+            <a:endParaRPr lang="en-US" sz="2000" b="1" dirty="0"/>
           </a:p>
           <a:p>
             <a:pPr marL="800100" lvl="1" indent="-342900">
@@ -12925,7 +12533,7 @@
               <a:buFont typeface="Arial" panose="020B0604020202020204" pitchFamily="34" charset="0"/>
               <a:buChar char="•"/>
             </a:pPr>
-            <a:endParaRPr lang="en-US" sz="2000" b="1" dirty="0" smtClean="0"/>
+            <a:endParaRPr lang="en-US" sz="2000" b="1" dirty="0"/>
           </a:p>
           <a:p>
             <a:pPr marL="800100" lvl="1" indent="-342900">
@@ -12947,25 +12555,17 @@
             </a:pPr>
             <a:r>
               <a:rPr lang="en-US" sz="2000" b="1" dirty="0"/>
-              <a:t>Converting: </a:t>
-            </a:r>
-            <a:r>
-              <a:rPr lang="en-US" sz="2000" b="1" dirty="0" smtClean="0"/>
-              <a:t>Voltage </a:t>
-            </a:r>
-            <a:r>
-              <a:rPr lang="en-US" sz="2000" b="1" dirty="0" smtClean="0">
+              <a:t>Converting: Voltage </a:t>
+            </a:r>
+            <a:r>
+              <a:rPr lang="en-US" sz="2000" b="1" dirty="0">
                 <a:sym typeface="Wingdings" pitchFamily="2" charset="2"/>
               </a:rPr>
               <a:t> </a:t>
             </a:r>
             <a:r>
-              <a:rPr lang="en-US" sz="2000" b="1" dirty="0" smtClean="0"/>
-              <a:t>Engineering </a:t>
-            </a:r>
-            <a:r>
               <a:rPr lang="en-US" sz="2000" b="1" dirty="0"/>
-              <a:t>Units</a:t>
+              <a:t>Engineering Units</a:t>
             </a:r>
           </a:p>
           <a:p>
@@ -13003,12 +12603,12 @@
           <a:graphicData uri="http://schemas.openxmlformats.org/presentationml/2006/ole">
             <mc:AlternateContent xmlns:mc="http://schemas.openxmlformats.org/markup-compatibility/2006">
               <mc:Choice xmlns:v="urn:schemas-microsoft-com:vml" Requires="v">
-                <p:oleObj spid="_x0000_s4212" name="Equation" r:id="rId6" imgW="355446" imgH="228501" progId="Equation.3">
+                <p:oleObj name="Equation" r:id="rId5" imgW="355446" imgH="228501" progId="Equation.3">
                   <p:embed/>
                 </p:oleObj>
               </mc:Choice>
               <mc:Fallback>
-                <p:oleObj name="Equation" r:id="rId6" imgW="355446" imgH="228501" progId="Equation.3">
+                <p:oleObj name="Equation" r:id="rId5" imgW="355446" imgH="228501" progId="Equation.3">
                   <p:embed/>
                   <p:pic>
                     <p:nvPicPr>
@@ -13019,7 +12619,7 @@
                       <p:nvPr/>
                     </p:nvPicPr>
                     <p:blipFill>
-                      <a:blip r:embed="rId7">
+                      <a:blip r:embed="rId6">
                         <a:extLst>
                           <a:ext uri="{28A0092B-C50C-407E-A947-70E740481C1C}">
                             <a14:useLocalDpi xmlns:a14="http://schemas.microsoft.com/office/drawing/2010/main" val="0"/>
@@ -13307,12 +12907,12 @@
           <a:graphicData uri="http://schemas.openxmlformats.org/presentationml/2006/ole">
             <mc:AlternateContent xmlns:mc="http://schemas.openxmlformats.org/markup-compatibility/2006">
               <mc:Choice xmlns:v="urn:schemas-microsoft-com:vml" Requires="v">
-                <p:oleObj spid="_x0000_s4213" name="Equation" r:id="rId8" imgW="88746" imgH="152136" progId="Equation.3">
+                <p:oleObj name="Equation" r:id="rId7" imgW="88746" imgH="152136" progId="Equation.3">
                   <p:embed/>
                 </p:oleObj>
               </mc:Choice>
               <mc:Fallback>
-                <p:oleObj name="Equation" r:id="rId8" imgW="88746" imgH="152136" progId="Equation.3">
+                <p:oleObj name="Equation" r:id="rId7" imgW="88746" imgH="152136" progId="Equation.3">
                   <p:embed/>
                   <p:pic>
                     <p:nvPicPr>
@@ -13323,7 +12923,7 @@
                       <p:nvPr/>
                     </p:nvPicPr>
                     <p:blipFill>
-                      <a:blip r:embed="rId9">
+                      <a:blip r:embed="rId8">
                         <a:extLst>
                           <a:ext uri="{28A0092B-C50C-407E-A947-70E740481C1C}">
                             <a14:useLocalDpi xmlns:a14="http://schemas.microsoft.com/office/drawing/2010/main" val="0"/>
@@ -13492,12 +13092,12 @@
           <a:graphicData uri="http://schemas.openxmlformats.org/presentationml/2006/ole">
             <mc:AlternateContent xmlns:mc="http://schemas.openxmlformats.org/markup-compatibility/2006">
               <mc:Choice xmlns:v="urn:schemas-microsoft-com:vml" Requires="v">
-                <p:oleObj spid="_x0000_s4214" name="Equation" r:id="rId10" imgW="228501" imgH="215806" progId="Equation.3">
+                <p:oleObj name="Equation" r:id="rId9" imgW="228501" imgH="215806" progId="Equation.3">
                   <p:embed/>
                 </p:oleObj>
               </mc:Choice>
               <mc:Fallback>
-                <p:oleObj name="Equation" r:id="rId10" imgW="228501" imgH="215806" progId="Equation.3">
+                <p:oleObj name="Equation" r:id="rId9" imgW="228501" imgH="215806" progId="Equation.3">
                   <p:embed/>
                   <p:pic>
                     <p:nvPicPr>
@@ -13508,7 +13108,7 @@
                       <p:nvPr/>
                     </p:nvPicPr>
                     <p:blipFill>
-                      <a:blip r:embed="rId11">
+                      <a:blip r:embed="rId10">
                         <a:extLst>
                           <a:ext uri="{28A0092B-C50C-407E-A947-70E740481C1C}">
                             <a14:useLocalDpi xmlns:a14="http://schemas.microsoft.com/office/drawing/2010/main" val="0"/>
@@ -13593,12 +13193,12 @@
           <a:graphicData uri="http://schemas.openxmlformats.org/presentationml/2006/ole">
             <mc:AlternateContent xmlns:mc="http://schemas.openxmlformats.org/markup-compatibility/2006">
               <mc:Choice xmlns:v="urn:schemas-microsoft-com:vml" Requires="v">
-                <p:oleObj spid="_x0000_s4215" name="Equation" r:id="rId12" imgW="215619" imgH="215619" progId="Equation.3">
+                <p:oleObj name="Equation" r:id="rId11" imgW="215619" imgH="215619" progId="Equation.3">
                   <p:embed/>
                 </p:oleObj>
               </mc:Choice>
               <mc:Fallback>
-                <p:oleObj name="Equation" r:id="rId12" imgW="215619" imgH="215619" progId="Equation.3">
+                <p:oleObj name="Equation" r:id="rId11" imgW="215619" imgH="215619" progId="Equation.3">
                   <p:embed/>
                   <p:pic>
                     <p:nvPicPr>
@@ -13609,7 +13209,7 @@
                       <p:nvPr/>
                     </p:nvPicPr>
                     <p:blipFill>
-                      <a:blip r:embed="rId13">
+                      <a:blip r:embed="rId12">
                         <a:extLst>
                           <a:ext uri="{28A0092B-C50C-407E-A947-70E740481C1C}">
                             <a14:useLocalDpi xmlns:a14="http://schemas.microsoft.com/office/drawing/2010/main" val="0"/>
@@ -13736,12 +13336,12 @@
           <a:graphicData uri="http://schemas.openxmlformats.org/presentationml/2006/ole">
             <mc:AlternateContent xmlns:mc="http://schemas.openxmlformats.org/markup-compatibility/2006">
               <mc:Choice xmlns:v="urn:schemas-microsoft-com:vml" Requires="v">
-                <p:oleObj spid="_x0000_s4216" name="Equation" r:id="rId14" imgW="190500" imgH="228600" progId="Equation.3">
+                <p:oleObj name="Equation" r:id="rId13" imgW="190500" imgH="228600" progId="Equation.3">
                   <p:embed/>
                 </p:oleObj>
               </mc:Choice>
               <mc:Fallback>
-                <p:oleObj name="Equation" r:id="rId14" imgW="190500" imgH="228600" progId="Equation.3">
+                <p:oleObj name="Equation" r:id="rId13" imgW="190500" imgH="228600" progId="Equation.3">
                   <p:embed/>
                   <p:pic>
                     <p:nvPicPr>
@@ -13752,7 +13352,7 @@
                       <p:nvPr/>
                     </p:nvPicPr>
                     <p:blipFill>
-                      <a:blip r:embed="rId15">
+                      <a:blip r:embed="rId14">
                         <a:extLst>
                           <a:ext uri="{28A0092B-C50C-407E-A947-70E740481C1C}">
                             <a14:useLocalDpi xmlns:a14="http://schemas.microsoft.com/office/drawing/2010/main" val="0"/>
@@ -13831,12 +13431,12 @@
           <a:graphicData uri="http://schemas.openxmlformats.org/presentationml/2006/ole">
             <mc:AlternateContent xmlns:mc="http://schemas.openxmlformats.org/markup-compatibility/2006">
               <mc:Choice xmlns:v="urn:schemas-microsoft-com:vml" Requires="v">
-                <p:oleObj spid="_x0000_s4217" name="Equation" r:id="rId16" imgW="1549400" imgH="838200" progId="Equation.3">
+                <p:oleObj name="Equation" r:id="rId15" imgW="1549400" imgH="838200" progId="Equation.3">
                   <p:embed/>
                 </p:oleObj>
               </mc:Choice>
               <mc:Fallback>
-                <p:oleObj name="Equation" r:id="rId16" imgW="1549400" imgH="838200" progId="Equation.3">
+                <p:oleObj name="Equation" r:id="rId15" imgW="1549400" imgH="838200" progId="Equation.3">
                   <p:embed/>
                   <p:pic>
                     <p:nvPicPr>
@@ -13847,7 +13447,7 @@
                       <p:nvPr/>
                     </p:nvPicPr>
                     <p:blipFill>
-                      <a:blip r:embed="rId17">
+                      <a:blip r:embed="rId16">
                         <a:extLst>
                           <a:ext uri="{28A0092B-C50C-407E-A947-70E740481C1C}">
                             <a14:useLocalDpi xmlns:a14="http://schemas.microsoft.com/office/drawing/2010/main" val="0"/>
@@ -13932,12 +13532,12 @@
           <a:graphicData uri="http://schemas.openxmlformats.org/presentationml/2006/ole">
             <mc:AlternateContent xmlns:mc="http://schemas.openxmlformats.org/markup-compatibility/2006">
               <mc:Choice xmlns:v="urn:schemas-microsoft-com:vml" Requires="v">
-                <p:oleObj spid="_x0000_s4218" name="Equation" r:id="rId18" imgW="2222500" imgH="635000" progId="Equation.3">
+                <p:oleObj name="Equation" r:id="rId17" imgW="2222500" imgH="635000" progId="Equation.3">
                   <p:embed/>
                 </p:oleObj>
               </mc:Choice>
               <mc:Fallback>
-                <p:oleObj name="Equation" r:id="rId18" imgW="2222500" imgH="635000" progId="Equation.3">
+                <p:oleObj name="Equation" r:id="rId17" imgW="2222500" imgH="635000" progId="Equation.3">
                   <p:embed/>
                   <p:pic>
                     <p:nvPicPr>
@@ -13948,7 +13548,7 @@
                       <p:nvPr/>
                     </p:nvPicPr>
                     <p:blipFill>
-                      <a:blip r:embed="rId19">
+                      <a:blip r:embed="rId18">
                         <a:extLst>
                           <a:ext uri="{28A0092B-C50C-407E-A947-70E740481C1C}">
                             <a14:useLocalDpi xmlns:a14="http://schemas.microsoft.com/office/drawing/2010/main" val="0"/>
@@ -14041,7 +13641,7 @@
       </p:sp>
     </p:spTree>
     <p:custDataLst>
-      <p:tags r:id="rId3"/>
+      <p:tags r:id="rId2"/>
     </p:custDataLst>
     <p:extLst>
       <p:ext uri="{BB962C8B-B14F-4D97-AF65-F5344CB8AC3E}">
@@ -14052,14 +13652,6 @@
   <p:clrMapOvr>
     <a:overrideClrMapping bg1="lt1" tx1="dk1" bg2="lt2" tx2="dk2" accent1="accent1" accent2="accent2" accent3="accent3" accent4="accent4" accent5="accent5" accent6="accent6" hlink="hlink" folHlink="folHlink"/>
   </p:clrMapOvr>
-  <mc:AlternateContent xmlns:mc="http://schemas.openxmlformats.org/markup-compatibility/2006" xmlns:p14="http://schemas.microsoft.com/office/powerpoint/2010/main">
-    <mc:Choice Requires="p14">
-      <p:transition spd="slow" p14:dur="2000"/>
-    </mc:Choice>
-    <mc:Fallback xmlns="">
-      <p:transition spd="slow"/>
-    </mc:Fallback>
-  </mc:AlternateContent>
   <p:timing>
     <p:tnLst>
       <p:par>
@@ -14291,16 +13883,12 @@
           <a:lstStyle/>
           <a:p>
             <a:r>
-              <a:rPr lang="en-US" sz="3200" dirty="0" smtClean="0">
+              <a:rPr lang="en-US" sz="3200" dirty="0">
                 <a:latin typeface="+mj-lt"/>
                 <a:cs typeface="B Titr" panose="00000700000000000000" pitchFamily="2" charset="-78"/>
               </a:rPr>
               <a:t>Conversion: DAC</a:t>
             </a:r>
-            <a:endParaRPr lang="en-US" sz="3200" dirty="0">
-              <a:latin typeface="+mj-lt"/>
-              <a:cs typeface="B Titr" panose="00000700000000000000" pitchFamily="2" charset="-78"/>
-            </a:endParaRPr>
           </a:p>
         </p:txBody>
       </p:sp>
@@ -14361,14 +13949,11 @@
           <a:p>
             <a:pPr algn="ctr" rtl="1"/>
             <a:r>
-              <a:rPr lang="en-US" sz="1400" dirty="0" smtClean="0">
+              <a:rPr lang="en-US" sz="1400" dirty="0">
                 <a:cs typeface="B Titr" panose="00000700000000000000" pitchFamily="2" charset="-78"/>
               </a:rPr>
               <a:t>Microprocessors and Assembly Language, Fall 2024, AUT, Tehran, Iran </a:t>
             </a:r>
-            <a:endParaRPr lang="en-US" sz="1400" dirty="0">
-              <a:cs typeface="B Titr" panose="00000700000000000000" pitchFamily="2" charset="-78"/>
-            </a:endParaRPr>
           </a:p>
         </p:txBody>
       </p:sp>
@@ -14399,21 +13984,13 @@
                 <a:spcPct val="150000"/>
               </a:lnSpc>
             </a:pPr>
-            <a:r>
-              <a:rPr lang="en-US" sz="2000" dirty="0"/>
-              <a:t/>
-            </a:r>
             <a:br>
               <a:rPr lang="en-US" sz="2000" dirty="0"/>
             </a:br>
-            <a:r>
-              <a:rPr lang="en-US" sz="2000" dirty="0"/>
-              <a:t/>
-            </a:r>
             <a:br>
               <a:rPr lang="en-US" sz="2000" dirty="0"/>
             </a:br>
-            <a:endParaRPr lang="en-US" sz="2000" b="1" dirty="0" smtClean="0">
+            <a:endParaRPr lang="en-US" sz="2000" b="1" dirty="0">
               <a:solidFill>
                 <a:srgbClr val="00B050"/>
               </a:solidFill>
@@ -14452,17 +14029,8 @@
             </a:pPr>
             <a:r>
               <a:rPr lang="en-US" sz="2000" b="1" dirty="0"/>
-              <a:t>DAC </a:t>
-            </a:r>
-            <a:r>
-              <a:rPr lang="en-US" sz="2000" b="1" dirty="0" smtClean="0"/>
-              <a:t>1</a:t>
-            </a:r>
-            <a:r>
-              <a:rPr lang="en-US" sz="2000" b="1" dirty="0"/>
-              <a:t>:  Voltage Divider</a:t>
-            </a:r>
-            <a:endParaRPr lang="en-US" sz="2000" b="1" dirty="0" smtClean="0"/>
+              <a:t>DAC 1:  Voltage Divider</a:t>
+            </a:r>
           </a:p>
           <a:p>
             <a:pPr marL="800100" lvl="1" indent="-342900">
@@ -14482,7 +14050,7 @@
               <a:buFont typeface="Arial" panose="020B0604020202020204" pitchFamily="34" charset="0"/>
               <a:buChar char="•"/>
             </a:pPr>
-            <a:endParaRPr lang="en-US" sz="2000" b="1" dirty="0" smtClean="0"/>
+            <a:endParaRPr lang="en-US" sz="2000" b="1" dirty="0"/>
           </a:p>
           <a:p>
             <a:pPr marL="800100" lvl="1" indent="-342900">
@@ -14502,7 +14070,7 @@
               <a:buFont typeface="Arial" panose="020B0604020202020204" pitchFamily="34" charset="0"/>
               <a:buChar char="•"/>
             </a:pPr>
-            <a:endParaRPr lang="en-US" sz="2000" b="1" dirty="0" smtClean="0"/>
+            <a:endParaRPr lang="en-US" sz="2000" b="1" dirty="0"/>
           </a:p>
           <a:p>
             <a:pPr marL="800100" lvl="1" indent="-342900">
@@ -14628,21 +14196,6 @@
   <p:clrMapOvr>
     <a:overrideClrMapping bg1="lt1" tx1="dk1" bg2="lt2" tx2="dk2" accent1="accent1" accent2="accent2" accent3="accent3" accent4="accent4" accent5="accent5" accent6="accent6" hlink="hlink" folHlink="folHlink"/>
   </p:clrMapOvr>
-  <mc:AlternateContent xmlns:mc="http://schemas.openxmlformats.org/markup-compatibility/2006" xmlns:p14="http://schemas.microsoft.com/office/powerpoint/2010/main">
-    <mc:Choice Requires="p14">
-      <p:transition spd="slow" p14:dur="2000"/>
-    </mc:Choice>
-    <mc:Fallback xmlns="">
-      <p:transition spd="slow"/>
-    </mc:Fallback>
-  </mc:AlternateContent>
-  <p:timing>
-    <p:tnLst>
-      <p:par>
-        <p:cTn id="1" dur="indefinite" restart="never" nodeType="tmRoot"/>
-      </p:par>
-    </p:tnLst>
-  </p:timing>
 </p:sld>
 </file>
 
@@ -14695,16 +14248,12 @@
           <a:lstStyle/>
           <a:p>
             <a:r>
-              <a:rPr lang="en-US" sz="3200" dirty="0" smtClean="0">
+              <a:rPr lang="en-US" sz="3200" dirty="0">
                 <a:latin typeface="+mj-lt"/>
                 <a:cs typeface="B Titr" panose="00000700000000000000" pitchFamily="2" charset="-78"/>
               </a:rPr>
               <a:t>Conversion: DAC</a:t>
             </a:r>
-            <a:endParaRPr lang="en-US" sz="3200" dirty="0">
-              <a:latin typeface="+mj-lt"/>
-              <a:cs typeface="B Titr" panose="00000700000000000000" pitchFamily="2" charset="-78"/>
-            </a:endParaRPr>
           </a:p>
         </p:txBody>
       </p:sp>
@@ -14765,14 +14314,11 @@
           <a:p>
             <a:pPr algn="ctr" rtl="1"/>
             <a:r>
-              <a:rPr lang="en-US" sz="1400" dirty="0" smtClean="0">
+              <a:rPr lang="en-US" sz="1400" dirty="0">
                 <a:cs typeface="B Titr" panose="00000700000000000000" pitchFamily="2" charset="-78"/>
               </a:rPr>
               <a:t>Microprocessors and Assembly Language, Fall 2024, AUT, Tehran, Iran </a:t>
             </a:r>
-            <a:endParaRPr lang="en-US" sz="1400" dirty="0">
-              <a:cs typeface="B Titr" panose="00000700000000000000" pitchFamily="2" charset="-78"/>
-            </a:endParaRPr>
           </a:p>
         </p:txBody>
       </p:sp>
@@ -14803,21 +14349,13 @@
                 <a:spcPct val="150000"/>
               </a:lnSpc>
             </a:pPr>
-            <a:r>
-              <a:rPr lang="en-US" sz="2000" dirty="0"/>
-              <a:t/>
-            </a:r>
             <a:br>
               <a:rPr lang="en-US" sz="2000" dirty="0"/>
             </a:br>
-            <a:r>
-              <a:rPr lang="en-US" sz="2000" dirty="0"/>
-              <a:t/>
-            </a:r>
             <a:br>
               <a:rPr lang="en-US" sz="2000" dirty="0"/>
             </a:br>
-            <a:endParaRPr lang="en-US" sz="2000" b="1" dirty="0" smtClean="0">
+            <a:endParaRPr lang="en-US" sz="2000" b="1" dirty="0">
               <a:solidFill>
                 <a:srgbClr val="00B050"/>
               </a:solidFill>
@@ -14856,17 +14394,8 @@
             </a:pPr>
             <a:r>
               <a:rPr lang="en-US" sz="2000" b="1" dirty="0"/>
-              <a:t>DAC </a:t>
-            </a:r>
-            <a:r>
-              <a:rPr lang="en-US" sz="2000" b="1" dirty="0" smtClean="0"/>
-              <a:t>2</a:t>
-            </a:r>
-            <a:r>
-              <a:rPr lang="en-US" sz="2000" b="1" dirty="0"/>
-              <a:t>:  R/2R Ladder </a:t>
-            </a:r>
-            <a:endParaRPr lang="en-US" sz="2000" b="1" dirty="0" smtClean="0"/>
+              <a:t>DAC 2:  R/2R Ladder </a:t>
+            </a:r>
           </a:p>
           <a:p>
             <a:pPr marL="800100" lvl="1" indent="-342900">
@@ -14886,7 +14415,7 @@
               <a:buFont typeface="Arial" panose="020B0604020202020204" pitchFamily="34" charset="0"/>
               <a:buChar char="•"/>
             </a:pPr>
-            <a:endParaRPr lang="en-US" sz="2000" b="1" dirty="0" smtClean="0"/>
+            <a:endParaRPr lang="en-US" sz="2000" b="1" dirty="0"/>
           </a:p>
           <a:p>
             <a:pPr marL="800100" lvl="1" indent="-342900">
@@ -14906,7 +14435,7 @@
               <a:buFont typeface="Arial" panose="020B0604020202020204" pitchFamily="34" charset="0"/>
               <a:buChar char="•"/>
             </a:pPr>
-            <a:endParaRPr lang="en-US" sz="2000" b="1" dirty="0" smtClean="0"/>
+            <a:endParaRPr lang="en-US" sz="2000" b="1" dirty="0"/>
           </a:p>
           <a:p>
             <a:pPr marL="800100" lvl="1" indent="-342900">
@@ -15032,21 +14561,6 @@
   <p:clrMapOvr>
     <a:overrideClrMapping bg1="lt1" tx1="dk1" bg2="lt2" tx2="dk2" accent1="accent1" accent2="accent2" accent3="accent3" accent4="accent4" accent5="accent5" accent6="accent6" hlink="hlink" folHlink="folHlink"/>
   </p:clrMapOvr>
-  <mc:AlternateContent xmlns:mc="http://schemas.openxmlformats.org/markup-compatibility/2006" xmlns:p14="http://schemas.microsoft.com/office/powerpoint/2010/main">
-    <mc:Choice Requires="p14">
-      <p:transition spd="slow" p14:dur="2000"/>
-    </mc:Choice>
-    <mc:Fallback xmlns="">
-      <p:transition spd="slow"/>
-    </mc:Fallback>
-  </mc:AlternateContent>
-  <p:timing>
-    <p:tnLst>
-      <p:par>
-        <p:cTn id="1" dur="indefinite" restart="never" nodeType="tmRoot"/>
-      </p:par>
-    </p:tnLst>
-  </p:timing>
 </p:sld>
 </file>
 
@@ -15099,16 +14613,12 @@
           <a:lstStyle/>
           <a:p>
             <a:r>
-              <a:rPr lang="en-US" sz="3200" dirty="0" smtClean="0">
+              <a:rPr lang="en-US" sz="3200" dirty="0">
                 <a:latin typeface="+mj-lt"/>
                 <a:cs typeface="B Titr" panose="00000700000000000000" pitchFamily="2" charset="-78"/>
               </a:rPr>
               <a:t>ADC in SAM3X</a:t>
             </a:r>
-            <a:endParaRPr lang="en-US" sz="3200" dirty="0">
-              <a:latin typeface="+mj-lt"/>
-              <a:cs typeface="B Titr" panose="00000700000000000000" pitchFamily="2" charset="-78"/>
-            </a:endParaRPr>
           </a:p>
         </p:txBody>
       </p:sp>
@@ -15169,14 +14679,11 @@
           <a:p>
             <a:pPr algn="ctr" rtl="1"/>
             <a:r>
-              <a:rPr lang="en-US" sz="1400" dirty="0" smtClean="0">
+              <a:rPr lang="en-US" sz="1400" dirty="0">
                 <a:cs typeface="B Titr" panose="00000700000000000000" pitchFamily="2" charset="-78"/>
               </a:rPr>
               <a:t>Microprocessors and Assembly Language, Fall 2024, AUT, Tehran, Iran </a:t>
             </a:r>
-            <a:endParaRPr lang="en-US" sz="1400" dirty="0">
-              <a:cs typeface="B Titr" panose="00000700000000000000" pitchFamily="2" charset="-78"/>
-            </a:endParaRPr>
           </a:p>
         </p:txBody>
       </p:sp>
@@ -15207,21 +14714,13 @@
                 <a:spcPct val="150000"/>
               </a:lnSpc>
             </a:pPr>
-            <a:r>
-              <a:rPr lang="en-US" sz="2000" dirty="0"/>
-              <a:t/>
-            </a:r>
             <a:br>
               <a:rPr lang="en-US" sz="2000" dirty="0"/>
             </a:br>
-            <a:r>
-              <a:rPr lang="en-US" sz="2000" dirty="0"/>
-              <a:t/>
-            </a:r>
             <a:br>
               <a:rPr lang="en-US" sz="2000" dirty="0"/>
             </a:br>
-            <a:endParaRPr lang="en-US" sz="2000" b="1" dirty="0" smtClean="0">
+            <a:endParaRPr lang="en-US" sz="2000" b="1" dirty="0">
               <a:solidFill>
                 <a:srgbClr val="00B050"/>
               </a:solidFill>
@@ -15259,16 +14758,8 @@
               <a:buChar char="•"/>
             </a:pPr>
             <a:r>
-              <a:rPr lang="en-US" sz="2000" b="1" dirty="0" smtClean="0"/>
-              <a:t>A </a:t>
-            </a:r>
-            <a:r>
               <a:rPr lang="en-US" sz="2000" b="1" dirty="0"/>
-              <a:t>16-to-1 analog </a:t>
-            </a:r>
-            <a:r>
-              <a:rPr lang="en-US" sz="2000" b="1" dirty="0" smtClean="0"/>
-              <a:t>multiplexer</a:t>
+              <a:t>A 16-to-1 analog multiplexer</a:t>
             </a:r>
           </a:p>
           <a:p>
@@ -15280,24 +14771,8 @@
               <a:buChar char="•"/>
             </a:pPr>
             <a:r>
-              <a:rPr lang="en-US" sz="2000" b="1" dirty="0" smtClean="0"/>
-              <a:t>Making </a:t>
-            </a:r>
-            <a:r>
               <a:rPr lang="en-US" sz="2000" b="1" dirty="0"/>
-              <a:t>possible the </a:t>
-            </a:r>
-            <a:r>
-              <a:rPr lang="en-US" sz="2000" b="1" dirty="0" smtClean="0"/>
-              <a:t>analog-to-digital conversions </a:t>
-            </a:r>
-            <a:r>
-              <a:rPr lang="en-US" sz="2000" b="1" dirty="0"/>
-              <a:t>of 16 analog </a:t>
-            </a:r>
-            <a:r>
-              <a:rPr lang="en-US" sz="2000" b="1" dirty="0" smtClean="0"/>
-              <a:t>lines</a:t>
+              <a:t>Making possible the analog-to-digital conversions of 16 analog lines</a:t>
             </a:r>
           </a:p>
           <a:p>
@@ -15310,11 +14785,7 @@
             </a:pPr>
             <a:r>
               <a:rPr lang="en-US" sz="2000" b="1" dirty="0"/>
-              <a:t>The conversions extend from 0V to </a:t>
-            </a:r>
-            <a:r>
-              <a:rPr lang="en-US" sz="2000" b="1" dirty="0" smtClean="0"/>
-              <a:t>ADVREF</a:t>
+              <a:t>The conversions extend from 0V to ADVREF</a:t>
             </a:r>
           </a:p>
           <a:p>
@@ -15326,16 +14797,8 @@
               <a:buChar char="•"/>
             </a:pPr>
             <a:r>
-              <a:rPr lang="en-US" sz="2000" b="1" dirty="0" smtClean="0"/>
-              <a:t>Supports </a:t>
-            </a:r>
-            <a:r>
               <a:rPr lang="en-US" sz="2000" b="1" dirty="0"/>
-              <a:t>an 10-bit or </a:t>
-            </a:r>
-            <a:r>
-              <a:rPr lang="en-US" sz="2000" b="1" dirty="0" smtClean="0"/>
-              <a:t>12-bit resolution mode</a:t>
+              <a:t>Supports an 10-bit or 12-bit resolution mode</a:t>
             </a:r>
           </a:p>
           <a:p>
@@ -15347,16 +14810,8 @@
               <a:buChar char="•"/>
             </a:pPr>
             <a:r>
-              <a:rPr lang="en-US" sz="2000" b="1" dirty="0" smtClean="0"/>
-              <a:t>Conversion </a:t>
-            </a:r>
-            <a:r>
               <a:rPr lang="en-US" sz="2000" b="1" dirty="0"/>
-              <a:t>results are reported in a common register for all </a:t>
-            </a:r>
-            <a:r>
-              <a:rPr lang="en-US" sz="2000" b="1" dirty="0" smtClean="0"/>
-              <a:t>channels</a:t>
+              <a:t>Conversion results are reported in a common register for all channels</a:t>
             </a:r>
           </a:p>
           <a:p>
@@ -15368,16 +14823,8 @@
               <a:buChar char="•"/>
             </a:pPr>
             <a:r>
-              <a:rPr lang="en-US" sz="2000" b="1" dirty="0" smtClean="0"/>
-              <a:t>As </a:t>
-            </a:r>
-            <a:r>
               <a:rPr lang="en-US" sz="2000" b="1" dirty="0"/>
-              <a:t>well as in </a:t>
-            </a:r>
-            <a:r>
-              <a:rPr lang="en-US" sz="2000" b="1" dirty="0" smtClean="0"/>
-              <a:t>a channel-dedicated register</a:t>
+              <a:t>As well as in a channel-dedicated register</a:t>
             </a:r>
           </a:p>
           <a:p>
@@ -15390,11 +14837,7 @@
             </a:pPr>
             <a:r>
               <a:rPr lang="en-US" sz="2000" b="1" dirty="0"/>
-              <a:t>1 MHz Conversion </a:t>
-            </a:r>
-            <a:r>
-              <a:rPr lang="en-US" sz="2000" b="1" dirty="0" smtClean="0"/>
-              <a:t>Rate</a:t>
+              <a:t>1 MHz Conversion Rate</a:t>
             </a:r>
           </a:p>
           <a:p>
@@ -15409,16 +14852,6 @@
               <a:rPr lang="en-US" sz="2000" b="1" dirty="0"/>
               <a:t>Individual Enable and Disable of Each Channel</a:t>
             </a:r>
-          </a:p>
-          <a:p>
-            <a:pPr marL="800100" lvl="1" indent="-342900">
-              <a:lnSpc>
-                <a:spcPct val="150000"/>
-              </a:lnSpc>
-              <a:buFont typeface="Arial" panose="020B0604020202020204" pitchFamily="34" charset="0"/>
-              <a:buChar char="•"/>
-            </a:pPr>
-            <a:endParaRPr lang="en-US" sz="2000" b="1" dirty="0" smtClean="0"/>
           </a:p>
           <a:p>
             <a:pPr marL="800100" lvl="1" indent="-342900">
@@ -15438,7 +14871,17 @@
               <a:buFont typeface="Arial" panose="020B0604020202020204" pitchFamily="34" charset="0"/>
               <a:buChar char="•"/>
             </a:pPr>
-            <a:endParaRPr lang="en-US" sz="2000" b="1" dirty="0" smtClean="0"/>
+            <a:endParaRPr lang="en-US" sz="2000" b="1" dirty="0"/>
+          </a:p>
+          <a:p>
+            <a:pPr marL="800100" lvl="1" indent="-342900">
+              <a:lnSpc>
+                <a:spcPct val="150000"/>
+              </a:lnSpc>
+              <a:buFont typeface="Arial" panose="020B0604020202020204" pitchFamily="34" charset="0"/>
+              <a:buChar char="•"/>
+            </a:pPr>
+            <a:endParaRPr lang="en-US" sz="2000" b="1" dirty="0"/>
           </a:p>
           <a:p>
             <a:pPr marL="800100" lvl="1" indent="-342900">
@@ -15503,14 +14946,6 @@
   <p:clrMapOvr>
     <a:overrideClrMapping bg1="lt1" tx1="dk1" bg2="lt2" tx2="dk2" accent1="accent1" accent2="accent2" accent3="accent3" accent4="accent4" accent5="accent5" accent6="accent6" hlink="hlink" folHlink="folHlink"/>
   </p:clrMapOvr>
-  <mc:AlternateContent xmlns:mc="http://schemas.openxmlformats.org/markup-compatibility/2006" xmlns:p14="http://schemas.microsoft.com/office/powerpoint/2010/main">
-    <mc:Choice Requires="p14">
-      <p:transition spd="slow" p14:dur="2000"/>
-    </mc:Choice>
-    <mc:Fallback xmlns="">
-      <p:transition spd="slow"/>
-    </mc:Fallback>
-  </mc:AlternateContent>
   <p:timing>
     <p:tnLst>
       <p:par>
@@ -16020,16 +15455,12 @@
           <a:lstStyle/>
           <a:p>
             <a:r>
-              <a:rPr lang="en-US" sz="3200" dirty="0" smtClean="0">
+              <a:rPr lang="en-US" sz="3200" dirty="0">
                 <a:latin typeface="+mj-lt"/>
                 <a:cs typeface="B Titr" panose="00000700000000000000" pitchFamily="2" charset="-78"/>
               </a:rPr>
               <a:t>ADC in SAM3X</a:t>
             </a:r>
-            <a:endParaRPr lang="en-US" sz="3200" dirty="0">
-              <a:latin typeface="+mj-lt"/>
-              <a:cs typeface="B Titr" panose="00000700000000000000" pitchFamily="2" charset="-78"/>
-            </a:endParaRPr>
           </a:p>
         </p:txBody>
       </p:sp>
@@ -16090,14 +15521,11 @@
           <a:p>
             <a:pPr algn="ctr" rtl="1"/>
             <a:r>
-              <a:rPr lang="en-US" sz="1400" dirty="0" smtClean="0">
+              <a:rPr lang="en-US" sz="1400" dirty="0">
                 <a:cs typeface="B Titr" panose="00000700000000000000" pitchFamily="2" charset="-78"/>
               </a:rPr>
               <a:t>Microprocessors and Assembly Language, Fall 2024, AUT, Tehran, Iran </a:t>
             </a:r>
-            <a:endParaRPr lang="en-US" sz="1400" dirty="0">
-              <a:cs typeface="B Titr" panose="00000700000000000000" pitchFamily="2" charset="-78"/>
-            </a:endParaRPr>
           </a:p>
         </p:txBody>
       </p:sp>
@@ -16128,21 +15556,13 @@
                 <a:spcPct val="150000"/>
               </a:lnSpc>
             </a:pPr>
-            <a:r>
-              <a:rPr lang="en-US" sz="2000" dirty="0"/>
-              <a:t/>
-            </a:r>
             <a:br>
               <a:rPr lang="en-US" sz="2000" dirty="0"/>
             </a:br>
-            <a:r>
-              <a:rPr lang="en-US" sz="2000" dirty="0"/>
-              <a:t/>
-            </a:r>
             <a:br>
               <a:rPr lang="en-US" sz="2000" dirty="0"/>
             </a:br>
-            <a:endParaRPr lang="en-US" sz="2000" b="1" dirty="0" smtClean="0">
+            <a:endParaRPr lang="en-US" sz="2000" b="1" dirty="0">
               <a:solidFill>
                 <a:srgbClr val="00B050"/>
               </a:solidFill>
@@ -16181,11 +15601,7 @@
             </a:pPr>
             <a:r>
               <a:rPr lang="en-US" sz="2000" b="1" dirty="0"/>
-              <a:t>Analog-to-Digital Converter Block </a:t>
-            </a:r>
-            <a:r>
-              <a:rPr lang="en-US" sz="2000" b="1" dirty="0" smtClean="0"/>
-              <a:t>Diagram</a:t>
+              <a:t>Analog-to-Digital Converter Block Diagram</a:t>
             </a:r>
           </a:p>
           <a:p>
@@ -16306,14 +15722,6 @@
   <p:clrMapOvr>
     <a:overrideClrMapping bg1="lt1" tx1="dk1" bg2="lt2" tx2="dk2" accent1="accent1" accent2="accent2" accent3="accent3" accent4="accent4" accent5="accent5" accent6="accent6" hlink="hlink" folHlink="folHlink"/>
   </p:clrMapOvr>
-  <mc:AlternateContent xmlns:mc="http://schemas.openxmlformats.org/markup-compatibility/2006" xmlns:p14="http://schemas.microsoft.com/office/powerpoint/2010/main">
-    <mc:Choice Requires="p14">
-      <p:transition spd="slow" p14:dur="2000"/>
-    </mc:Choice>
-    <mc:Fallback xmlns="">
-      <p:transition spd="slow"/>
-    </mc:Fallback>
-  </mc:AlternateContent>
   <p:timing>
     <p:tnLst>
       <p:par>
@@ -16457,16 +15865,12 @@
           <a:lstStyle/>
           <a:p>
             <a:r>
-              <a:rPr lang="en-US" sz="3200" dirty="0" smtClean="0">
+              <a:rPr lang="en-US" sz="3200" dirty="0">
                 <a:latin typeface="+mj-lt"/>
                 <a:cs typeface="B Titr" panose="00000700000000000000" pitchFamily="2" charset="-78"/>
               </a:rPr>
               <a:t>DAC in SAM3X</a:t>
             </a:r>
-            <a:endParaRPr lang="en-US" sz="3200" dirty="0">
-              <a:latin typeface="+mj-lt"/>
-              <a:cs typeface="B Titr" panose="00000700000000000000" pitchFamily="2" charset="-78"/>
-            </a:endParaRPr>
           </a:p>
         </p:txBody>
       </p:sp>
@@ -16527,14 +15931,11 @@
           <a:p>
             <a:pPr algn="ctr" rtl="1"/>
             <a:r>
-              <a:rPr lang="en-US" sz="1400" dirty="0" smtClean="0">
+              <a:rPr lang="en-US" sz="1400" dirty="0">
                 <a:cs typeface="B Titr" panose="00000700000000000000" pitchFamily="2" charset="-78"/>
               </a:rPr>
               <a:t>Microprocessors and Assembly Language, Fall 2024, AUT, Tehran, Iran </a:t>
             </a:r>
-            <a:endParaRPr lang="en-US" sz="1400" dirty="0">
-              <a:cs typeface="B Titr" panose="00000700000000000000" pitchFamily="2" charset="-78"/>
-            </a:endParaRPr>
           </a:p>
         </p:txBody>
       </p:sp>
@@ -16565,21 +15966,13 @@
                 <a:spcPct val="150000"/>
               </a:lnSpc>
             </a:pPr>
-            <a:r>
-              <a:rPr lang="en-US" sz="2000" dirty="0"/>
-              <a:t/>
-            </a:r>
             <a:br>
               <a:rPr lang="en-US" sz="2000" dirty="0"/>
             </a:br>
-            <a:r>
-              <a:rPr lang="en-US" sz="2000" dirty="0"/>
-              <a:t/>
-            </a:r>
             <a:br>
               <a:rPr lang="en-US" sz="2000" dirty="0"/>
             </a:br>
-            <a:endParaRPr lang="en-US" sz="2000" b="1" dirty="0" smtClean="0">
+            <a:endParaRPr lang="en-US" sz="2000" b="1" dirty="0">
               <a:solidFill>
                 <a:srgbClr val="00B050"/>
               </a:solidFill>
@@ -16618,11 +16011,7 @@
             </a:pPr>
             <a:r>
               <a:rPr lang="en-US" sz="2000" b="1" dirty="0"/>
-              <a:t>Digital-to-Analog Converter Controller (</a:t>
-            </a:r>
-            <a:r>
-              <a:rPr lang="en-US" sz="2000" b="1" dirty="0" smtClean="0"/>
-              <a:t>DACC)</a:t>
+              <a:t>Digital-to-Analog Converter Controller (DACC)</a:t>
             </a:r>
           </a:p>
         </p:txBody>
@@ -16729,21 +16118,6 @@
   <p:clrMapOvr>
     <a:overrideClrMapping bg1="lt1" tx1="dk1" bg2="lt2" tx2="dk2" accent1="accent1" accent2="accent2" accent3="accent3" accent4="accent4" accent5="accent5" accent6="accent6" hlink="hlink" folHlink="folHlink"/>
   </p:clrMapOvr>
-  <mc:AlternateContent xmlns:mc="http://schemas.openxmlformats.org/markup-compatibility/2006" xmlns:p14="http://schemas.microsoft.com/office/powerpoint/2010/main">
-    <mc:Choice Requires="p14">
-      <p:transition spd="slow" p14:dur="2000"/>
-    </mc:Choice>
-    <mc:Fallback xmlns="">
-      <p:transition spd="slow"/>
-    </mc:Fallback>
-  </mc:AlternateContent>
-  <p:timing>
-    <p:tnLst>
-      <p:par>
-        <p:cTn id="1" dur="indefinite" restart="never" nodeType="tmRoot"/>
-      </p:par>
-    </p:tnLst>
-  </p:timing>
 </p:sld>
 </file>
 
@@ -16835,14 +16209,11 @@
           <a:p>
             <a:pPr algn="ctr" rtl="1"/>
             <a:r>
-              <a:rPr lang="en-US" sz="1400" dirty="0" smtClean="0">
+              <a:rPr lang="en-US" sz="1400" dirty="0">
                 <a:cs typeface="B Titr" panose="00000700000000000000" pitchFamily="2" charset="-78"/>
               </a:rPr>
               <a:t>Microprocessors and Assembly Language, Fall 2024, AUT, Tehran, Iran </a:t>
             </a:r>
-            <a:endParaRPr lang="en-US" sz="1400" dirty="0">
-              <a:cs typeface="B Titr" panose="00000700000000000000" pitchFamily="2" charset="-78"/>
-            </a:endParaRPr>
           </a:p>
         </p:txBody>
       </p:sp>
@@ -16874,10 +16245,10 @@
               </a:lnSpc>
             </a:pPr>
             <a:r>
-              <a:rPr lang="en-US" sz="4000" b="1" dirty="0" smtClean="0"/>
+              <a:rPr lang="en-US" sz="4000" b="1" dirty="0"/>
               <a:t>The End!</a:t>
             </a:r>
-            <a:endParaRPr lang="en-US" sz="3200" b="1" dirty="0" smtClean="0"/>
+            <a:endParaRPr lang="en-US" sz="3200" b="1" dirty="0"/>
           </a:p>
         </p:txBody>
       </p:sp>
@@ -16891,21 +16262,6 @@
   <p:clrMapOvr>
     <a:overrideClrMapping bg1="lt1" tx1="dk1" bg2="lt2" tx2="dk2" accent1="accent1" accent2="accent2" accent3="accent3" accent4="accent4" accent5="accent5" accent6="accent6" hlink="hlink" folHlink="folHlink"/>
   </p:clrMapOvr>
-  <mc:AlternateContent xmlns:mc="http://schemas.openxmlformats.org/markup-compatibility/2006" xmlns:p14="http://schemas.microsoft.com/office/powerpoint/2010/main">
-    <mc:Choice Requires="p14">
-      <p:transition spd="slow" p14:dur="2000"/>
-    </mc:Choice>
-    <mc:Fallback xmlns="">
-      <p:transition spd="slow"/>
-    </mc:Fallback>
-  </mc:AlternateContent>
-  <p:timing>
-    <p:tnLst>
-      <p:par>
-        <p:cTn id="1" dur="indefinite" restart="never" nodeType="tmRoot"/>
-      </p:par>
-    </p:tnLst>
-  </p:timing>
 </p:sld>
 </file>
 
@@ -17010,7 +16366,7 @@
           <a:lstStyle/>
           <a:p>
             <a:r>
-              <a:rPr lang="en-US" sz="2000" b="1" dirty="0" smtClean="0"/>
+              <a:rPr lang="en-US" sz="2000" b="1" dirty="0"/>
               <a:t>Parts (text &amp; figures) of this lecture are adopted from:</a:t>
             </a:r>
           </a:p>
@@ -17049,22 +16405,16 @@
               <a:t> </a:t>
             </a:r>
             <a:r>
-              <a:rPr lang="en-US" sz="2000" b="1" dirty="0" err="1" smtClean="0">
+              <a:rPr lang="en-US" sz="2000" b="1" dirty="0" err="1">
                 <a:cs typeface="B Nazanin" pitchFamily="2" charset="-78"/>
               </a:rPr>
               <a:t>Dutta</a:t>
             </a:r>
             <a:r>
-              <a:rPr lang="en-US" sz="2000" b="1" dirty="0" smtClean="0">
-                <a:cs typeface="B Nazanin" pitchFamily="2" charset="-78"/>
-              </a:rPr>
-              <a:t>, “EECS 373 Design </a:t>
-            </a:r>
-            <a:r>
               <a:rPr lang="en-US" sz="2000" b="1" dirty="0">
                 <a:cs typeface="B Nazanin" pitchFamily="2" charset="-78"/>
               </a:rPr>
-              <a:t>of Microprocessor-Based Systems,” University of Michigan</a:t>
+              <a:t>, “EECS 373 Design of Microprocessor-Based Systems,” University of Michigan</a:t>
             </a:r>
           </a:p>
           <a:p>
@@ -17087,7 +16437,7 @@
               <a:buFont typeface="Arial" panose="020B0604020202020204" pitchFamily="34" charset="0"/>
               <a:buChar char="•"/>
             </a:pPr>
-            <a:endParaRPr lang="en-US" sz="2000" b="1" dirty="0" smtClean="0">
+            <a:endParaRPr lang="en-US" sz="2000" b="1" dirty="0">
               <a:cs typeface="B Nazanin" pitchFamily="2" charset="-78"/>
             </a:endParaRPr>
           </a:p>
@@ -17100,22 +16450,10 @@
               <a:buChar char="•"/>
             </a:pPr>
             <a:r>
-              <a:rPr lang="en-US" sz="2000" b="1" dirty="0" smtClean="0">
-                <a:cs typeface="B Nazanin" pitchFamily="2" charset="-78"/>
-              </a:rPr>
-              <a:t>Atmel </a:t>
-            </a:r>
-            <a:r>
               <a:rPr lang="en-US" sz="2000" b="1" dirty="0">
                 <a:cs typeface="B Nazanin" pitchFamily="2" charset="-78"/>
               </a:rPr>
-              <a:t>| SMART ARM-based MCU DATASHEET, SAM3X / SAM3A Series, </a:t>
-            </a:r>
-            <a:r>
-              <a:rPr lang="en-US" sz="2000" b="1" dirty="0" smtClean="0">
-                <a:cs typeface="B Nazanin" pitchFamily="2" charset="-78"/>
-              </a:rPr>
-              <a:t>Atmel-11057C-ATARM-SAM3X-SAM3A-Datasheet_23-Mar-15</a:t>
+              <a:t>Atmel | SMART ARM-based MCU DATASHEET, SAM3X / SAM3A Series, Atmel-11057C-ATARM-SAM3X-SAM3A-Datasheet_23-Mar-15</a:t>
             </a:r>
           </a:p>
           <a:p>
@@ -17155,14 +16493,11 @@
           <a:p>
             <a:pPr algn="ctr" rtl="1"/>
             <a:r>
-              <a:rPr lang="en-US" sz="1400" dirty="0" smtClean="0">
+              <a:rPr lang="en-US" sz="1400" dirty="0">
                 <a:cs typeface="B Titr" panose="00000700000000000000" pitchFamily="2" charset="-78"/>
               </a:rPr>
               <a:t>Microprocessors and Assembly Language, Fall 2024, AUT, Tehran, Iran </a:t>
             </a:r>
-            <a:endParaRPr lang="en-US" sz="1400" dirty="0">
-              <a:cs typeface="B Titr" panose="00000700000000000000" pitchFamily="2" charset="-78"/>
-            </a:endParaRPr>
           </a:p>
         </p:txBody>
       </p:sp>
@@ -17176,21 +16511,6 @@
   <p:clrMapOvr>
     <a:masterClrMapping/>
   </p:clrMapOvr>
-  <mc:AlternateContent xmlns:mc="http://schemas.openxmlformats.org/markup-compatibility/2006" xmlns:p14="http://schemas.microsoft.com/office/powerpoint/2010/main">
-    <mc:Choice Requires="p14">
-      <p:transition spd="slow" p14:dur="2000"/>
-    </mc:Choice>
-    <mc:Fallback xmlns="">
-      <p:transition spd="slow"/>
-    </mc:Fallback>
-  </mc:AlternateContent>
-  <p:timing>
-    <p:tnLst>
-      <p:par>
-        <p:cTn id="1" dur="indefinite" restart="never" nodeType="tmRoot"/>
-      </p:par>
-    </p:tnLst>
-  </p:timing>
 </p:sld>
 </file>
 
@@ -17282,14 +16602,11 @@
           <a:p>
             <a:pPr algn="ctr" rtl="1"/>
             <a:r>
-              <a:rPr lang="en-US" sz="1400" dirty="0" smtClean="0">
+              <a:rPr lang="en-US" sz="1400" dirty="0">
                 <a:cs typeface="B Titr" panose="00000700000000000000" pitchFamily="2" charset="-78"/>
               </a:rPr>
               <a:t>Microprocessors and Assembly Language, Fall 2024, AUT, Tehran, Iran </a:t>
             </a:r>
-            <a:endParaRPr lang="en-US" sz="1400" dirty="0">
-              <a:cs typeface="B Titr" panose="00000700000000000000" pitchFamily="2" charset="-78"/>
-            </a:endParaRPr>
           </a:p>
         </p:txBody>
       </p:sp>
@@ -17322,13 +16639,8 @@
             </a:pPr>
             <a:r>
               <a:rPr lang="en-US" sz="3600" b="1" dirty="0"/>
-              <a:t>Sampling, ADCs, and </a:t>
-            </a:r>
-            <a:r>
-              <a:rPr lang="en-US" sz="3600" b="1" dirty="0" smtClean="0"/>
-              <a:t>DACs</a:t>
-            </a:r>
-            <a:endParaRPr lang="en-US" sz="3600" b="1" dirty="0"/>
+              <a:t>Sampling, ADCs, and DACs</a:t>
+            </a:r>
           </a:p>
         </p:txBody>
       </p:sp>
@@ -17381,21 +16693,6 @@
   <p:clrMapOvr>
     <a:overrideClrMapping bg1="lt1" tx1="dk1" bg2="lt2" tx2="dk2" accent1="accent1" accent2="accent2" accent3="accent3" accent4="accent4" accent5="accent5" accent6="accent6" hlink="hlink" folHlink="folHlink"/>
   </p:clrMapOvr>
-  <mc:AlternateContent xmlns:mc="http://schemas.openxmlformats.org/markup-compatibility/2006" xmlns:p14="http://schemas.microsoft.com/office/powerpoint/2010/main">
-    <mc:Choice Requires="p14">
-      <p:transition spd="slow" p14:dur="2000"/>
-    </mc:Choice>
-    <mc:Fallback xmlns="">
-      <p:transition spd="slow"/>
-    </mc:Fallback>
-  </mc:AlternateContent>
-  <p:timing>
-    <p:tnLst>
-      <p:par>
-        <p:cTn id="1" dur="indefinite" restart="never" nodeType="tmRoot"/>
-      </p:par>
-    </p:tnLst>
-  </p:timing>
 </p:sld>
 </file>
 
@@ -17514,14 +16811,11 @@
           <a:p>
             <a:pPr algn="ctr" rtl="1"/>
             <a:r>
-              <a:rPr lang="en-US" sz="1400" dirty="0" smtClean="0">
+              <a:rPr lang="en-US" sz="1400" dirty="0">
                 <a:cs typeface="B Titr" panose="00000700000000000000" pitchFamily="2" charset="-78"/>
               </a:rPr>
               <a:t>Microprocessors and Assembly Language, Fall 2024, AUT, Tehran, Iran </a:t>
             </a:r>
-            <a:endParaRPr lang="en-US" sz="1400" dirty="0">
-              <a:cs typeface="B Titr" panose="00000700000000000000" pitchFamily="2" charset="-78"/>
-            </a:endParaRPr>
           </a:p>
         </p:txBody>
       </p:sp>
@@ -17552,21 +16846,13 @@
                 <a:spcPct val="150000"/>
               </a:lnSpc>
             </a:pPr>
-            <a:r>
-              <a:rPr lang="en-US" sz="2000" dirty="0"/>
-              <a:t/>
-            </a:r>
             <a:br>
               <a:rPr lang="en-US" sz="2000" dirty="0"/>
             </a:br>
-            <a:r>
-              <a:rPr lang="en-US" sz="2000" dirty="0"/>
-              <a:t/>
-            </a:r>
             <a:br>
               <a:rPr lang="en-US" sz="2000" dirty="0"/>
             </a:br>
-            <a:endParaRPr lang="en-US" sz="2000" b="1" dirty="0" smtClean="0">
+            <a:endParaRPr lang="en-US" sz="2000" b="1" dirty="0">
               <a:solidFill>
                 <a:srgbClr val="00B050"/>
               </a:solidFill>
@@ -17981,14 +17267,6 @@
   <p:clrMapOvr>
     <a:overrideClrMapping bg1="lt1" tx1="dk1" bg2="lt2" tx2="dk2" accent1="accent1" accent2="accent2" accent3="accent3" accent4="accent4" accent5="accent5" accent6="accent6" hlink="hlink" folHlink="folHlink"/>
   </p:clrMapOvr>
-  <mc:AlternateContent xmlns:mc="http://schemas.openxmlformats.org/markup-compatibility/2006" xmlns:p14="http://schemas.microsoft.com/office/powerpoint/2010/main">
-    <mc:Choice Requires="p14">
-      <p:transition spd="slow" p14:dur="2000"/>
-    </mc:Choice>
-    <mc:Fallback xmlns="">
-      <p:transition spd="slow"/>
-    </mc:Fallback>
-  </mc:AlternateContent>
   <p:timing>
     <p:tnLst>
       <p:par>
@@ -18620,16 +17898,12 @@
           <a:lstStyle/>
           <a:p>
             <a:r>
-              <a:rPr lang="en-US" sz="3200" dirty="0" smtClean="0">
+              <a:rPr lang="en-US" sz="3200" dirty="0">
                 <a:latin typeface="+mj-lt"/>
                 <a:cs typeface="B Titr" panose="00000700000000000000" pitchFamily="2" charset="-78"/>
               </a:rPr>
               <a:t>Transducers</a:t>
             </a:r>
-            <a:endParaRPr lang="en-US" sz="3200" dirty="0">
-              <a:latin typeface="+mj-lt"/>
-              <a:cs typeface="B Titr" panose="00000700000000000000" pitchFamily="2" charset="-78"/>
-            </a:endParaRPr>
           </a:p>
         </p:txBody>
       </p:sp>
@@ -18690,14 +17964,11 @@
           <a:p>
             <a:pPr algn="ctr" rtl="1"/>
             <a:r>
-              <a:rPr lang="en-US" sz="1400" dirty="0" smtClean="0">
+              <a:rPr lang="en-US" sz="1400" dirty="0">
                 <a:cs typeface="B Titr" panose="00000700000000000000" pitchFamily="2" charset="-78"/>
               </a:rPr>
               <a:t>Microprocessors and Assembly Language, Fall 2024, AUT, Tehran, Iran </a:t>
             </a:r>
-            <a:endParaRPr lang="en-US" sz="1400" dirty="0">
-              <a:cs typeface="B Titr" panose="00000700000000000000" pitchFamily="2" charset="-78"/>
-            </a:endParaRPr>
           </a:p>
         </p:txBody>
       </p:sp>
@@ -18728,21 +17999,13 @@
                 <a:spcPct val="150000"/>
               </a:lnSpc>
             </a:pPr>
-            <a:r>
-              <a:rPr lang="en-US" sz="2000" dirty="0"/>
-              <a:t/>
-            </a:r>
             <a:br>
               <a:rPr lang="en-US" sz="2000" dirty="0"/>
             </a:br>
-            <a:r>
-              <a:rPr lang="en-US" sz="2000" dirty="0"/>
-              <a:t/>
-            </a:r>
             <a:br>
               <a:rPr lang="en-US" sz="2000" dirty="0"/>
             </a:br>
-            <a:endParaRPr lang="en-US" sz="2000" b="1" dirty="0" smtClean="0">
+            <a:endParaRPr lang="en-US" sz="2000" b="1" dirty="0">
               <a:solidFill>
                 <a:srgbClr val="00B050"/>
               </a:solidFill>
@@ -18781,11 +18044,7 @@
             </a:pPr>
             <a:r>
               <a:rPr lang="en-US" sz="2000" b="1" dirty="0"/>
-              <a:t>Transducers convert one form of energy into </a:t>
-            </a:r>
-            <a:r>
-              <a:rPr lang="en-US" sz="2000" b="1" dirty="0" smtClean="0"/>
-              <a:t>another</a:t>
+              <a:t>Transducers convert one form of energy into another</a:t>
             </a:r>
           </a:p>
           <a:p>
@@ -18800,7 +18059,6 @@
               <a:rPr lang="en-US" b="1" dirty="0"/>
               <a:t>Allow us to convert physical phenomena to a voltage potential in a well-defined way</a:t>
             </a:r>
-            <a:endParaRPr lang="en-US" b="1" dirty="0" smtClean="0"/>
           </a:p>
         </p:txBody>
       </p:sp>
@@ -19028,29 +18286,16 @@
           <a:p>
             <a:r>
               <a:rPr lang="en-US" sz="1600" dirty="0"/>
-              <a:t>While the term transducer commonly implies use as a sensor/detector, any device which converts energy </a:t>
-            </a:r>
-            <a:r>
-              <a:rPr lang="en-US" sz="1600" dirty="0" smtClean="0"/>
-              <a:t>can </a:t>
-            </a:r>
-            <a:r>
-              <a:rPr lang="en-US" sz="1600" dirty="0"/>
-              <a:t>be considered a transducer. </a:t>
-            </a:r>
-            <a:r>
-              <a:rPr lang="en-US" sz="1600" dirty="0" smtClean="0">
+              <a:t>While the term transducer commonly implies use as a sensor/detector, any device which converts energy can be considered a transducer. </a:t>
+            </a:r>
+            <a:r>
+              <a:rPr lang="en-US" sz="1600" dirty="0">
                 <a:solidFill>
                   <a:srgbClr val="FF0000"/>
                 </a:solidFill>
               </a:rPr>
               <a:t>[Wikipedia]</a:t>
             </a:r>
-            <a:endParaRPr lang="en-US" sz="1600" dirty="0">
-              <a:solidFill>
-                <a:srgbClr val="FF0000"/>
-              </a:solidFill>
-            </a:endParaRPr>
           </a:p>
         </p:txBody>
       </p:sp>
@@ -19064,21 +18309,6 @@
   <p:clrMapOvr>
     <a:overrideClrMapping bg1="lt1" tx1="dk1" bg2="lt2" tx2="dk2" accent1="accent1" accent2="accent2" accent3="accent3" accent4="accent4" accent5="accent5" accent6="accent6" hlink="hlink" folHlink="folHlink"/>
   </p:clrMapOvr>
-  <mc:AlternateContent xmlns:mc="http://schemas.openxmlformats.org/markup-compatibility/2006" xmlns:p14="http://schemas.microsoft.com/office/powerpoint/2010/main">
-    <mc:Choice Requires="p14">
-      <p:transition spd="slow" p14:dur="2000"/>
-    </mc:Choice>
-    <mc:Fallback xmlns="">
-      <p:transition spd="slow"/>
-    </mc:Fallback>
-  </mc:AlternateContent>
-  <p:timing>
-    <p:tnLst>
-      <p:par>
-        <p:cTn id="1" dur="indefinite" restart="never" nodeType="tmRoot"/>
-      </p:par>
-    </p:tnLst>
-  </p:timing>
 </p:sld>
 </file>
 
@@ -19131,16 +18361,12 @@
           <a:lstStyle/>
           <a:p>
             <a:r>
-              <a:rPr lang="en-US" sz="3200" dirty="0" smtClean="0">
+              <a:rPr lang="en-US" sz="3200" dirty="0">
                 <a:latin typeface="+mj-lt"/>
                 <a:cs typeface="B Titr" panose="00000700000000000000" pitchFamily="2" charset="-78"/>
               </a:rPr>
               <a:t>An Example: Photocell</a:t>
             </a:r>
-            <a:endParaRPr lang="en-US" sz="3200" dirty="0">
-              <a:latin typeface="+mj-lt"/>
-              <a:cs typeface="B Titr" panose="00000700000000000000" pitchFamily="2" charset="-78"/>
-            </a:endParaRPr>
           </a:p>
         </p:txBody>
       </p:sp>
@@ -19201,14 +18427,11 @@
           <a:p>
             <a:pPr algn="ctr" rtl="1"/>
             <a:r>
-              <a:rPr lang="en-US" sz="1400" dirty="0" smtClean="0">
+              <a:rPr lang="en-US" sz="1400" dirty="0">
                 <a:cs typeface="B Titr" panose="00000700000000000000" pitchFamily="2" charset="-78"/>
               </a:rPr>
               <a:t>Microprocessors and Assembly Language, Fall 2024, AUT, Tehran, Iran </a:t>
             </a:r>
-            <a:endParaRPr lang="en-US" sz="1400" dirty="0">
-              <a:cs typeface="B Titr" panose="00000700000000000000" pitchFamily="2" charset="-78"/>
-            </a:endParaRPr>
           </a:p>
         </p:txBody>
       </p:sp>
@@ -19239,21 +18462,13 @@
                 <a:spcPct val="150000"/>
               </a:lnSpc>
             </a:pPr>
-            <a:r>
-              <a:rPr lang="en-US" sz="2000" dirty="0"/>
-              <a:t/>
-            </a:r>
             <a:br>
               <a:rPr lang="en-US" sz="2000" dirty="0"/>
             </a:br>
-            <a:r>
-              <a:rPr lang="en-US" sz="2000" dirty="0"/>
-              <a:t/>
-            </a:r>
             <a:br>
               <a:rPr lang="en-US" sz="2000" dirty="0"/>
             </a:br>
-            <a:endParaRPr lang="en-US" sz="2000" b="1" dirty="0" smtClean="0">
+            <a:endParaRPr lang="en-US" sz="2000" b="1" dirty="0">
               <a:solidFill>
                 <a:srgbClr val="00B050"/>
               </a:solidFill>
@@ -19295,16 +18510,12 @@
               <a:t>Convert light to voltage with a </a:t>
             </a:r>
             <a:r>
-              <a:rPr lang="en-US" sz="2000" b="1" dirty="0" err="1" smtClean="0"/>
+              <a:rPr lang="en-US" sz="2000" b="1" dirty="0" err="1"/>
               <a:t>CdS</a:t>
             </a:r>
             <a:r>
               <a:rPr lang="en-US" sz="2000" b="1" dirty="0"/>
-              <a:t> </a:t>
-            </a:r>
-            <a:r>
-              <a:rPr lang="en-US" sz="2000" b="1" dirty="0" smtClean="0"/>
-              <a:t>Photocell</a:t>
+              <a:t> Photocell</a:t>
             </a:r>
           </a:p>
           <a:p>
@@ -19314,24 +18525,20 @@
               </a:lnSpc>
             </a:pPr>
             <a:r>
-              <a:rPr lang="en-US" b="1" dirty="0" smtClean="0"/>
+              <a:rPr lang="en-US" b="1" dirty="0"/>
               <a:t>	</a:t>
             </a:r>
             <a:r>
-              <a:rPr lang="en-US" b="1" dirty="0" err="1" smtClean="0"/>
+              <a:rPr lang="en-US" b="1" dirty="0" err="1"/>
               <a:t>V</a:t>
             </a:r>
             <a:r>
-              <a:rPr lang="en-US" b="1" baseline="-25000" dirty="0" err="1" smtClean="0"/>
+              <a:rPr lang="en-US" b="1" baseline="-25000" dirty="0" err="1"/>
               <a:t>signal</a:t>
             </a:r>
             <a:r>
-              <a:rPr lang="en-US" b="1" dirty="0" smtClean="0"/>
-              <a:t> </a:t>
-            </a:r>
-            <a:r>
               <a:rPr lang="en-US" b="1" dirty="0"/>
-              <a:t>= (+5V) R</a:t>
+              <a:t> = (+5V) R</a:t>
             </a:r>
             <a:r>
               <a:rPr lang="en-US" b="1" baseline="-25000" dirty="0"/>
@@ -19411,20 +18618,16 @@
               <a:buChar char="•"/>
             </a:pPr>
             <a:r>
-              <a:rPr lang="en-US" b="1" dirty="0" err="1" smtClean="0"/>
+              <a:rPr lang="en-US" b="1" dirty="0" err="1"/>
               <a:t>t</a:t>
             </a:r>
             <a:r>
-              <a:rPr lang="en-US" b="1" baseline="-25000" dirty="0" err="1" smtClean="0"/>
+              <a:rPr lang="en-US" b="1" baseline="-25000" dirty="0" err="1"/>
               <a:t>RC</a:t>
             </a:r>
             <a:r>
-              <a:rPr lang="en-US" b="1" dirty="0" smtClean="0"/>
-              <a:t> </a:t>
-            </a:r>
-            <a:r>
               <a:rPr lang="en-US" b="1" dirty="0"/>
-              <a:t>= (R+R</a:t>
+              <a:t> = (R+R</a:t>
             </a:r>
             <a:r>
               <a:rPr lang="en-US" b="1" baseline="-25000" dirty="0"/>
@@ -19453,11 +18656,11 @@
               <a:buChar char="•"/>
             </a:pPr>
             <a:r>
-              <a:rPr lang="en-US" b="1" dirty="0" smtClean="0"/>
+              <a:rPr lang="en-US" b="1" dirty="0"/>
               <a:t>Typically R~50-200k</a:t>
             </a:r>
             <a:r>
-              <a:rPr lang="en-US" dirty="0" smtClean="0">
+              <a:rPr lang="en-US" dirty="0">
                 <a:latin typeface="Symbol" pitchFamily="18" charset="2"/>
               </a:rPr>
               <a:t>W</a:t>
@@ -19527,7 +18730,7 @@
               <a:buFont typeface="Arial" panose="020B0604020202020204" pitchFamily="34" charset="0"/>
               <a:buChar char="•"/>
             </a:pPr>
-            <a:endParaRPr lang="en-US" b="1" dirty="0" smtClean="0"/>
+            <a:endParaRPr lang="en-US" b="1" dirty="0"/>
           </a:p>
         </p:txBody>
       </p:sp>
@@ -19623,21 +18826,6 @@
   <p:clrMapOvr>
     <a:overrideClrMapping bg1="lt1" tx1="dk1" bg2="lt2" tx2="dk2" accent1="accent1" accent2="accent2" accent3="accent3" accent4="accent4" accent5="accent5" accent6="accent6" hlink="hlink" folHlink="folHlink"/>
   </p:clrMapOvr>
-  <mc:AlternateContent xmlns:mc="http://schemas.openxmlformats.org/markup-compatibility/2006" xmlns:p14="http://schemas.microsoft.com/office/powerpoint/2010/main">
-    <mc:Choice Requires="p14">
-      <p:transition spd="slow" p14:dur="2000"/>
-    </mc:Choice>
-    <mc:Fallback xmlns="">
-      <p:transition spd="slow"/>
-    </mc:Fallback>
-  </mc:AlternateContent>
-  <p:timing>
-    <p:tnLst>
-      <p:par>
-        <p:cTn id="1" dur="indefinite" restart="never" nodeType="tmRoot"/>
-      </p:par>
-    </p:tnLst>
-  </p:timing>
 </p:sld>
 </file>
 
@@ -19756,14 +18944,11 @@
           <a:p>
             <a:pPr algn="ctr" rtl="1"/>
             <a:r>
-              <a:rPr lang="en-US" sz="1400" dirty="0" smtClean="0">
+              <a:rPr lang="en-US" sz="1400" dirty="0">
                 <a:cs typeface="B Titr" panose="00000700000000000000" pitchFamily="2" charset="-78"/>
               </a:rPr>
               <a:t>Microprocessors and Assembly Language, Fall 2024, AUT, Tehran, Iran </a:t>
             </a:r>
-            <a:endParaRPr lang="en-US" sz="1400" dirty="0">
-              <a:cs typeface="B Titr" panose="00000700000000000000" pitchFamily="2" charset="-78"/>
-            </a:endParaRPr>
           </a:p>
         </p:txBody>
       </p:sp>
@@ -19794,21 +18979,13 @@
                 <a:spcPct val="150000"/>
               </a:lnSpc>
             </a:pPr>
-            <a:r>
-              <a:rPr lang="en-US" sz="2000" dirty="0"/>
-              <a:t/>
-            </a:r>
             <a:br>
               <a:rPr lang="en-US" sz="2000" dirty="0"/>
             </a:br>
-            <a:r>
-              <a:rPr lang="en-US" sz="2000" dirty="0"/>
-              <a:t/>
-            </a:r>
             <a:br>
               <a:rPr lang="en-US" sz="2000" dirty="0"/>
             </a:br>
-            <a:endParaRPr lang="en-US" sz="2000" b="1" dirty="0" smtClean="0">
+            <a:endParaRPr lang="en-US" sz="2000" b="1" dirty="0">
               <a:solidFill>
                 <a:srgbClr val="00B050"/>
               </a:solidFill>
@@ -19859,10 +19036,9 @@
               <a:buChar char="•"/>
             </a:pPr>
             <a:r>
-              <a:rPr lang="en-US" sz="2000" b="1" dirty="0" smtClean="0"/>
+              <a:rPr lang="en-US" sz="2000" b="1" dirty="0"/>
               <a:t>Sound</a:t>
             </a:r>
-            <a:endParaRPr lang="en-US" sz="2000" b="1" dirty="0"/>
           </a:p>
           <a:p>
             <a:pPr marL="800100" lvl="1" indent="-342900">
@@ -19886,10 +19062,9 @@
               <a:buChar char="•"/>
             </a:pPr>
             <a:r>
-              <a:rPr lang="en-US" sz="2000" b="1" dirty="0" smtClean="0"/>
+              <a:rPr lang="en-US" sz="2000" b="1" dirty="0"/>
               <a:t>Position</a:t>
             </a:r>
-            <a:endParaRPr lang="en-US" sz="2000" b="1" dirty="0"/>
           </a:p>
           <a:p>
             <a:pPr marL="800100" lvl="1" indent="-342900">
@@ -19900,7 +19075,7 @@
               <a:buChar char="•"/>
             </a:pPr>
             <a:r>
-              <a:rPr lang="en-US" sz="2000" b="1" dirty="0" smtClean="0"/>
+              <a:rPr lang="en-US" sz="2000" b="1" dirty="0"/>
               <a:t>Gyros</a:t>
             </a:r>
           </a:p>
@@ -19913,7 +19088,7 @@
               <a:buChar char="•"/>
             </a:pPr>
             <a:r>
-              <a:rPr lang="en-US" sz="2000" b="1" dirty="0" smtClean="0"/>
+              <a:rPr lang="en-US" sz="2000" b="1" dirty="0"/>
               <a:t>Acceleration</a:t>
             </a:r>
           </a:p>
@@ -19939,7 +19114,7 @@
               <a:buChar char="•"/>
             </a:pPr>
             <a:r>
-              <a:rPr lang="en-US" b="1" dirty="0" smtClean="0"/>
+              <a:rPr lang="en-US" b="1" dirty="0"/>
               <a:t>…</a:t>
             </a:r>
           </a:p>
@@ -19983,21 +19158,6 @@
   <p:clrMapOvr>
     <a:overrideClrMapping bg1="lt1" tx1="dk1" bg2="lt2" tx2="dk2" accent1="accent1" accent2="accent2" accent3="accent3" accent4="accent4" accent5="accent5" accent6="accent6" hlink="hlink" folHlink="folHlink"/>
   </p:clrMapOvr>
-  <mc:AlternateContent xmlns:mc="http://schemas.openxmlformats.org/markup-compatibility/2006" xmlns:p14="http://schemas.microsoft.com/office/powerpoint/2010/main">
-    <mc:Choice Requires="p14">
-      <p:transition spd="slow" p14:dur="2000"/>
-    </mc:Choice>
-    <mc:Fallback xmlns="">
-      <p:transition spd="slow"/>
-    </mc:Fallback>
-  </mc:AlternateContent>
-  <p:timing>
-    <p:tnLst>
-      <p:par>
-        <p:cTn id="1" dur="indefinite" restart="never" nodeType="tmRoot"/>
-      </p:par>
-    </p:tnLst>
-  </p:timing>
 </p:sld>
 </file>
 
@@ -20054,33 +19214,8 @@
                 <a:latin typeface="+mj-lt"/>
                 <a:cs typeface="B Titr" panose="00000700000000000000" pitchFamily="2" charset="-78"/>
               </a:rPr>
-              <a:t>Going from </a:t>
-            </a:r>
-            <a:r>
-              <a:rPr lang="en-US" sz="3200" dirty="0" smtClean="0">
-                <a:latin typeface="+mj-lt"/>
-                <a:cs typeface="B Titr" panose="00000700000000000000" pitchFamily="2" charset="-78"/>
-              </a:rPr>
-              <a:t>Analog </a:t>
-            </a:r>
-            <a:r>
-              <a:rPr lang="en-US" sz="3200" dirty="0">
-                <a:latin typeface="+mj-lt"/>
-                <a:cs typeface="B Titr" panose="00000700000000000000" pitchFamily="2" charset="-78"/>
-              </a:rPr>
-              <a:t>to </a:t>
-            </a:r>
-            <a:r>
-              <a:rPr lang="en-US" sz="3200" dirty="0" smtClean="0">
-                <a:latin typeface="+mj-lt"/>
-                <a:cs typeface="B Titr" panose="00000700000000000000" pitchFamily="2" charset="-78"/>
-              </a:rPr>
-              <a:t>Digital</a:t>
-            </a:r>
-            <a:endParaRPr lang="en-US" sz="3200" dirty="0">
-              <a:latin typeface="+mj-lt"/>
-              <a:cs typeface="B Titr" panose="00000700000000000000" pitchFamily="2" charset="-78"/>
-            </a:endParaRPr>
+              <a:t>Going from Analog to Digital</a:t>
+            </a:r>
           </a:p>
         </p:txBody>
       </p:sp>
@@ -20141,14 +19276,11 @@
           <a:p>
             <a:pPr algn="ctr" rtl="1"/>
             <a:r>
-              <a:rPr lang="en-US" sz="1400" dirty="0" smtClean="0">
+              <a:rPr lang="en-US" sz="1400" dirty="0">
                 <a:cs typeface="B Titr" panose="00000700000000000000" pitchFamily="2" charset="-78"/>
               </a:rPr>
               <a:t>Microprocessors and Assembly Language, Fall 2024, AUT, Tehran, Iran </a:t>
             </a:r>
-            <a:endParaRPr lang="en-US" sz="1400" dirty="0">
-              <a:cs typeface="B Titr" panose="00000700000000000000" pitchFamily="2" charset="-78"/>
-            </a:endParaRPr>
           </a:p>
         </p:txBody>
       </p:sp>
@@ -20179,21 +19311,13 @@
                 <a:spcPct val="150000"/>
               </a:lnSpc>
             </a:pPr>
-            <a:r>
-              <a:rPr lang="en-US" sz="2000" dirty="0"/>
-              <a:t/>
-            </a:r>
             <a:br>
               <a:rPr lang="en-US" sz="2000" dirty="0"/>
             </a:br>
-            <a:r>
-              <a:rPr lang="en-US" sz="2000" dirty="0"/>
-              <a:t/>
-            </a:r>
             <a:br>
               <a:rPr lang="en-US" sz="2000" dirty="0"/>
             </a:br>
-            <a:endParaRPr lang="en-US" sz="2000" b="1" dirty="0" smtClean="0">
+            <a:endParaRPr lang="en-US" sz="2000" b="1" dirty="0">
               <a:solidFill>
                 <a:srgbClr val="00B050"/>
               </a:solidFill>
@@ -20232,11 +19356,7 @@
             </a:pPr>
             <a:r>
               <a:rPr lang="en-US" sz="2000" b="1" dirty="0"/>
-              <a:t>What we </a:t>
-            </a:r>
-            <a:r>
-              <a:rPr lang="en-US" sz="2000" b="1" dirty="0" smtClean="0"/>
-              <a:t>want</a:t>
+              <a:t>What we want</a:t>
             </a:r>
           </a:p>
           <a:p>
@@ -20257,7 +19377,7 @@
               <a:buFont typeface="Arial" panose="020B0604020202020204" pitchFamily="34" charset="0"/>
               <a:buChar char="•"/>
             </a:pPr>
-            <a:endParaRPr lang="en-US" sz="2000" b="1" dirty="0" smtClean="0"/>
+            <a:endParaRPr lang="en-US" sz="2000" b="1" dirty="0"/>
           </a:p>
           <a:p>
             <a:pPr marL="342900" indent="-342900">
@@ -20308,7 +19428,7 @@
               <a:buFont typeface="Arial" panose="020B0604020202020204" pitchFamily="34" charset="0"/>
               <a:buChar char="•"/>
             </a:pPr>
-            <a:endParaRPr lang="en-US" b="1" dirty="0" smtClean="0"/>
+            <a:endParaRPr lang="en-US" b="1" dirty="0"/>
           </a:p>
         </p:txBody>
       </p:sp>
@@ -21770,14 +20890,6 @@
   <p:clrMapOvr>
     <a:overrideClrMapping bg1="lt1" tx1="dk1" bg2="lt2" tx2="dk2" accent1="accent1" accent2="accent2" accent3="accent3" accent4="accent4" accent5="accent5" accent6="accent6" hlink="hlink" folHlink="folHlink"/>
   </p:clrMapOvr>
-  <mc:AlternateContent xmlns:mc="http://schemas.openxmlformats.org/markup-compatibility/2006" xmlns:p14="http://schemas.microsoft.com/office/powerpoint/2010/main">
-    <mc:Choice Requires="p14">
-      <p:transition spd="slow" p14:dur="2000"/>
-    </mc:Choice>
-    <mc:Fallback xmlns="">
-      <p:transition spd="slow"/>
-    </mc:Fallback>
-  </mc:AlternateContent>
   <p:timing>
     <p:tnLst>
       <p:par>
@@ -22029,14 +21141,11 @@
           <a:p>
             <a:pPr algn="ctr" rtl="1"/>
             <a:r>
-              <a:rPr lang="en-US" sz="1400" dirty="0" smtClean="0">
+              <a:rPr lang="en-US" sz="1400" dirty="0">
                 <a:cs typeface="B Titr" panose="00000700000000000000" pitchFamily="2" charset="-78"/>
               </a:rPr>
               <a:t>Microprocessors and Assembly Language, Fall 2024, AUT, Tehran, Iran </a:t>
             </a:r>
-            <a:endParaRPr lang="en-US" sz="1400" dirty="0">
-              <a:cs typeface="B Titr" panose="00000700000000000000" pitchFamily="2" charset="-78"/>
-            </a:endParaRPr>
           </a:p>
         </p:txBody>
       </p:sp>
@@ -22067,21 +21176,13 @@
                 <a:spcPct val="150000"/>
               </a:lnSpc>
             </a:pPr>
-            <a:r>
-              <a:rPr lang="en-US" sz="2000" dirty="0"/>
-              <a:t/>
-            </a:r>
             <a:br>
               <a:rPr lang="en-US" sz="2000" dirty="0"/>
             </a:br>
-            <a:r>
-              <a:rPr lang="en-US" sz="2000" dirty="0"/>
-              <a:t/>
-            </a:r>
             <a:br>
               <a:rPr lang="en-US" sz="2000" dirty="0"/>
             </a:br>
-            <a:endParaRPr lang="en-US" sz="2000" b="1" dirty="0" smtClean="0">
+            <a:endParaRPr lang="en-US" sz="2000" b="1" dirty="0">
               <a:solidFill>
                 <a:srgbClr val="00B050"/>
               </a:solidFill>
@@ -22133,11 +21234,7 @@
             </a:pPr>
             <a:r>
               <a:rPr lang="en-US" sz="2000" b="1" dirty="0"/>
-              <a:t>As a time series of discrete </a:t>
-            </a:r>
-            <a:r>
-              <a:rPr lang="en-US" sz="2000" b="1" dirty="0" smtClean="0"/>
-              <a:t>values</a:t>
+              <a:t>As a time series of discrete values</a:t>
             </a:r>
           </a:p>
           <a:p>
@@ -22149,18 +21246,9 @@
               <a:buChar char="•"/>
             </a:pPr>
             <a:r>
-              <a:rPr lang="en-US" sz="2000" b="1" dirty="0" smtClean="0"/>
-              <a:t>On </a:t>
-            </a:r>
-            <a:r>
               <a:rPr lang="en-US" sz="2000" b="1" dirty="0"/>
-              <a:t>MCU: read the ADC data register </a:t>
-            </a:r>
-            <a:r>
-              <a:rPr lang="en-US" sz="2000" b="1" dirty="0" smtClean="0"/>
-              <a:t>periodically</a:t>
-            </a:r>
-            <a:endParaRPr lang="en-US" sz="2000" b="1" dirty="0"/>
+              <a:t>On MCU: read the ADC data register periodically</a:t>
+            </a:r>
           </a:p>
           <a:p>
             <a:pPr marL="342900" indent="-342900">
@@ -22170,7 +21258,7 @@
               <a:buFont typeface="Arial" panose="020B0604020202020204" pitchFamily="34" charset="0"/>
               <a:buChar char="•"/>
             </a:pPr>
-            <a:endParaRPr lang="en-US" b="1" dirty="0" smtClean="0"/>
+            <a:endParaRPr lang="en-US" b="1" dirty="0"/>
           </a:p>
         </p:txBody>
       </p:sp>
@@ -22276,21 +21364,6 @@
   <p:clrMapOvr>
     <a:overrideClrMapping bg1="lt1" tx1="dk1" bg2="lt2" tx2="dk2" accent1="accent1" accent2="accent2" accent3="accent3" accent4="accent4" accent5="accent5" accent6="accent6" hlink="hlink" folHlink="folHlink"/>
   </p:clrMapOvr>
-  <mc:AlternateContent xmlns:mc="http://schemas.openxmlformats.org/markup-compatibility/2006" xmlns:p14="http://schemas.microsoft.com/office/powerpoint/2010/main">
-    <mc:Choice Requires="p14">
-      <p:transition spd="slow" p14:dur="2000"/>
-    </mc:Choice>
-    <mc:Fallback xmlns="">
-      <p:transition spd="slow"/>
-    </mc:Fallback>
-  </mc:AlternateContent>
-  <p:timing>
-    <p:tnLst>
-      <p:par>
-        <p:cTn id="1" dur="indefinite" restart="never" nodeType="tmRoot"/>
-      </p:par>
-    </p:tnLst>
-  </p:timing>
 </p:sld>
 </file>
 
